--- a/Lectures/week14/week14.pptx
+++ b/Lectures/week14/week14.pptx
@@ -22,6 +22,9 @@
     <p:sldId id="270" r:id="rId22"/>
     <p:sldId id="271" r:id="rId23"/>
     <p:sldId id="272" r:id="rId24"/>
+    <p:sldId id="273" r:id="rId25"/>
+    <p:sldId id="274" r:id="rId26"/>
+    <p:sldId id="275" r:id="rId27"/>
   </p:sldIdLst>
   <p:sldSz cx="12191695" cy="6858000" type="screen4x3"/>
   <p:notesSz cx="6858000" cy="9144000"/>
@@ -846,81 +849,84 @@
           <a:lstStyle/>
           <a:p>
             <a:r>
-              <a:t>Eight things. If you keep nothing else, keep this slide.</a:t>
+              <a:t>The whole semester on one axis. Five phases.</a:t>
             </a:r>
           </a:p>
           <a:p/>
           <a:p>
             <a:r>
-              <a:t>Ask what is being measured, and what you're certifying. That covers academic integrity and most</a:t>
-            </a:r>
-          </a:p>
-          <a:p>
-            <a:r>
-              <a:t>professional ethics.</a:t>
+              <a:t>Weeks one to three: understand. What these systems are, where they came from, why they are</a:t>
+            </a:r>
+          </a:p>
+          <a:p>
+            <a:r>
+              <a:t>confident and sometimes wrong.</a:t>
             </a:r>
           </a:p>
           <a:p/>
           <a:p>
             <a:r>
-              <a:t>Supply sources rather than instructing accuracy. "Be accurate" adds authority, not facts.</a:t>
+              <a:t>Weeks four and five: instruct. The four levers, register, structural contracts and the fallback</a:t>
+            </a:r>
+          </a:p>
+          <a:p>
+            <a:r>
+              <a:t>principle.</a:t>
             </a:r>
           </a:p>
           <a:p/>
           <a:p>
             <a:r>
-              <a:t>Ask for the basis of an answer, then check it. The quote test costs seconds and catches</a:t>
-            </a:r>
-          </a:p>
-          <a:p>
-            <a:r>
-              <a:t>fabrication, over-reading and poisoned summaries all at once.</a:t>
+              <a:t>Weeks six to eight: build and test. Micro-Tool, Grounded Assistant, Test Set. This is where the</a:t>
+            </a:r>
+          </a:p>
+          <a:p>
+            <a:r>
+              <a:t>course turned from knowing to doing.</a:t>
             </a:r>
           </a:p>
           <a:p/>
           <a:p>
             <a:r>
-              <a:t>Write three questions it cannot answer, before you trust any system. Three questions and five</a:t>
-            </a:r>
-          </a:p>
-          <a:p>
-            <a:r>
-              <a:t>minutes tell you more than a month of ordinary use.</a:t>
+              <a:t>Weeks nine to eleven: scale and adapt. Automation Chain, Field Build, Domain Pack.</a:t>
             </a:r>
           </a:p>
           <a:p/>
           <a:p>
             <a:r>
-              <a:t>Put the human before the irreversible action.</a:t>
+              <a:t>Weeks twelve to fourteen: defend and judge. Injection, ethics, and today.</a:t>
             </a:r>
           </a:p>
           <a:p/>
           <a:p>
             <a:r>
-              <a:t>Treat everything the system reads as instruction-carrying, not merely as data.</a:t>
+              <a:t>I want you to notice something about the order. Every phase depends on the one before it and</a:t>
+            </a:r>
+          </a:p>
+          <a:p>
+            <a:r>
+              <a:t>would have been incoherent without it. You could not have understood grounding in week two —</a:t>
+            </a:r>
+          </a:p>
+          <a:p>
+            <a:r>
+              <a:t>you'd have had no reason to think you needed it. You could not have appreciated week twelve</a:t>
+            </a:r>
+          </a:p>
+          <a:p>
+            <a:r>
+              <a:t>before you had built something worth attacking.</a:t>
             </a:r>
           </a:p>
           <a:p/>
           <a:p>
             <a:r>
-              <a:t>Name the person who would be harmed — a category is not an answer.</a:t>
-            </a:r>
-          </a:p>
-          <a:p/>
-          <a:p>
-            <a:r>
-              <a:t>And keep one skill you practise unaided.</a:t>
-            </a:r>
-          </a:p>
-          <a:p/>
-          <a:p>
-            <a:r>
-              <a:t>Eight habits. None of them require a particular tool, and none of them will be obsolete when the</a:t>
-            </a:r>
-          </a:p>
-          <a:p>
-            <a:r>
-              <a:t>tools change.</a:t>
+              <a:t>That's why it's a course rather than a set of topics. And it's why, if you're revising, revising</a:t>
+            </a:r>
+          </a:p>
+          <a:p>
+            <a:r>
+              <a:t>in order works much better than revising the hard bits.</a:t>
             </a:r>
           </a:p>
         </p:txBody>
@@ -990,7 +996,86 @@
           <a:lstStyle/>
           <a:p>
             <a:r>
-              <a:t>Part four. No mysteries.</a:t>
+              <a:t>Ten minutes, no devices. Six questions. Answer each in one or two sentences — to yourself, or to</a:t>
+            </a:r>
+          </a:p>
+          <a:p>
+            <a:r>
+              <a:t>the person next to you.</a:t>
+            </a:r>
+          </a:p>
+          <a:p/>
+          <a:p>
+            <a:r>
+              <a:t>These are deliberately chosen: they're the six questions that, if you can answer them properly,</a:t>
+            </a:r>
+          </a:p>
+          <a:p>
+            <a:r>
+              <a:t>mean you can answer most of what the final will ask. They are also, not coincidentally, the six</a:t>
+            </a:r>
+          </a:p>
+          <a:p>
+            <a:r>
+              <a:t>places where a plausible-sounding wrong answer is available.</a:t>
+            </a:r>
+          </a:p>
+          <a:p/>
+          <a:p>
+            <a:r>
+              <a:t>One. Why can these systems not simply say "I don't know"?</a:t>
+            </a:r>
+          </a:p>
+          <a:p/>
+          <a:p>
+            <a:r>
+              <a:t>Two. Why does "be accurate" fail to make an answer accurate?</a:t>
+            </a:r>
+          </a:p>
+          <a:p/>
+          <a:p>
+            <a:r>
+              <a:t>Three. A grounded answer has no quotation. What do you suspect, and why?</a:t>
+            </a:r>
+          </a:p>
+          <a:p/>
+          <a:p>
+            <a:r>
+              <a:t>Four. Why is ninety-five percent reliability per step not reassuring over ten steps?</a:t>
+            </a:r>
+          </a:p>
+          <a:p/>
+          <a:p>
+            <a:r>
+              <a:t>Five. Why is indirect injection worse for you than direct injection?</a:t>
+            </a:r>
+          </a:p>
+          <a:p/>
+          <a:p>
+            <a:r>
+              <a:t>Six. Why does professional formatting increase risk as well as usefulness?</a:t>
+            </a:r>
+          </a:p>
+          <a:p/>
+          <a:p>
+            <a:r>
+              <a:t>Take the ten minutes properly. The answers are on the next slide, and comparing your version</a:t>
+            </a:r>
+          </a:p>
+          <a:p>
+            <a:r>
+              <a:t>with mine is far more useful than reading mine cold.</a:t>
+            </a:r>
+          </a:p>
+          <a:p/>
+          <a:p>
+            <a:r>
+              <a:t>[Circulate if they're discussing. If the room is quiet, give them four minutes of thinking time</a:t>
+            </a:r>
+          </a:p>
+          <a:p>
+            <a:r>
+              <a:t>and then walk the answers — it works either way.]</a:t>
             </a:r>
           </a:p>
         </p:txBody>
@@ -1060,77 +1145,89 @@
           <a:lstStyle/>
           <a:p>
             <a:r>
-              <a:t>The format: forty multiple-choice questions, two and a half points each, ninety minutes, closed</a:t>
-            </a:r>
-          </a:p>
-          <a:p>
-            <a:r>
-              <a:t>book. Same shape as the midterm, so nothing about the format should surprise you.</a:t>
+              <a:t>Here are the answers. Compare them with yours, and pay attention to any where you had the right</a:t>
+            </a:r>
+          </a:p>
+          <a:p>
+            <a:r>
+              <a:t>conclusion but not the reason — the exam distractors are built for exactly that gap.</a:t>
             </a:r>
           </a:p>
           <a:p/>
           <a:p>
             <a:r>
-              <a:t>Coverage is the whole course, weighted towards weeks six to thirteen — because that's where the</a:t>
-            </a:r>
-          </a:p>
-          <a:p>
-            <a:r>
-              <a:t>judgment lives, and judgment is what I'm assessing.</a:t>
+              <a:t>One. "I don't know" is a token sequence competing with all others, and in training text questions</a:t>
+            </a:r>
+          </a:p>
+          <a:p>
+            <a:r>
+              <a:t>are followed by answers. Fine-tuning shifts the tendency; it installs no mechanism. If you said</a:t>
+            </a:r>
+          </a:p>
+          <a:p>
+            <a:r>
+              <a:t>"because it's overconfident," that's the observation, not the explanation.</a:t>
             </a:r>
           </a:p>
           <a:p/>
           <a:p>
             <a:r>
-              <a:t>Roughly a third is mechanism. Tokens, prediction, context windows, why hallucination happens.</a:t>
-            </a:r>
-          </a:p>
-          <a:p>
-            <a:r>
-              <a:t>These are the questions you can prepare for by understanding rather than memorising.</a:t>
+              <a:t>Two. Instructions change tone and shape, never available information. Requesting authority</a:t>
+            </a:r>
+          </a:p>
+          <a:p>
+            <a:r>
+              <a:t>produces authority.</a:t>
             </a:r>
           </a:p>
           <a:p/>
           <a:p>
             <a:r>
-              <a:t>Roughly a third is diagnosis. I give you an answer and its source and ask what's wrong with it.</a:t>
-            </a:r>
-          </a:p>
-          <a:p>
-            <a:r>
-              <a:t>Which of the failure modes is this? These are the questions the build weeks prepared you for,</a:t>
-            </a:r>
-          </a:p>
-          <a:p>
-            <a:r>
-              <a:t>and if you did the building they'll feel easy.</a:t>
+              <a:t>Three. Answered from memory. Absence of a quotation is its signature.</a:t>
             </a:r>
           </a:p>
           <a:p/>
           <a:p>
             <a:r>
-              <a:t>And roughly a third is design and judgment. Where does the human go? What should this system not</a:t>
-            </a:r>
-          </a:p>
-          <a:p>
-            <a:r>
-              <a:t>do? Which design rule does this workflow violate?</a:t>
+              <a:t>Four. Nought point nine five to the tenth is about nought point six — and crucially, errors are</a:t>
+            </a:r>
+          </a:p>
+          <a:p>
+            <a:r>
+              <a:t>inherited rather than averaged, because each step works on the previous step's output.</a:t>
             </a:r>
           </a:p>
           <a:p/>
           <a:p>
             <a:r>
-              <a:t>And the bold line: every "concepts you must be able to define and diagnose" slide is examinable</a:t>
-            </a:r>
-          </a:p>
-          <a:p>
-            <a:r>
-              <a:t>in full. There are seven of them, one per build week. That is your revision list, and it's</a:t>
-            </a:r>
-          </a:p>
-          <a:p>
-            <a:r>
-              <a:t>deliberately short.</a:t>
+              <a:t>Five. The instruction is hidden in content you never see, so there was no point at which you</a:t>
+            </a:r>
+          </a:p>
+          <a:p>
+            <a:r>
+              <a:t>could have refused. You're the victim rather than the attacker. If you said "because it's more</a:t>
+            </a:r>
+          </a:p>
+          <a:p>
+            <a:r>
+              <a:t>sophisticated," that's wrong — it isn't necessarily.</a:t>
+            </a:r>
+          </a:p>
+          <a:p/>
+          <a:p>
+            <a:r>
+              <a:t>Six. It makes wrong content look like competent professional work, so it's trusted more, while</a:t>
+            </a:r>
+          </a:p>
+          <a:p>
+            <a:r>
+              <a:t>correctness is unchanged.</a:t>
+            </a:r>
+          </a:p>
+          <a:p/>
+          <a:p>
+            <a:r>
+              <a:t>If you got five or six of those with the reasons, you're ready.</a:t>
             </a:r>
           </a:p>
         </p:txBody>
@@ -1200,66 +1297,81 @@
           <a:lstStyle/>
           <a:p>
             <a:r>
-              <a:t>Three pieces of revision advice.</a:t>
+              <a:t>Eight things. If you keep nothing else, keep this slide.</a:t>
             </a:r>
           </a:p>
           <a:p/>
           <a:p>
             <a:r>
-              <a:t>Learn the taxonomy by name. Nine failure modes across three groups — failures of the answer,</a:t>
-            </a:r>
-          </a:p>
-          <a:p>
-            <a:r>
-              <a:t>failures of built systems, failures with an author. Most diagnosis questions are asking you to</a:t>
-            </a:r>
-          </a:p>
-          <a:p>
-            <a:r>
-              <a:t>name one. If you can name them reliably, that third of the paper is straightforward.</a:t>
+              <a:t>Ask what is being measured, and what you're certifying. That covers academic integrity and most</a:t>
+            </a:r>
+          </a:p>
+          <a:p>
+            <a:r>
+              <a:t>professional ethics.</a:t>
             </a:r>
           </a:p>
           <a:p/>
           <a:p>
             <a:r>
-              <a:t>Be able to explain mechanisms, not just state them. Not "it hallucinates" but why — there's no</a:t>
-            </a:r>
-          </a:p>
-          <a:p>
-            <a:r>
-              <a:t>truth check, it optimises plausibility, and in thin coverage plausible and true come apart. The</a:t>
-            </a:r>
-          </a:p>
-          <a:p>
-            <a:r>
-              <a:t>distractors on the mechanism questions are designed to catch people who memorised the label</a:t>
-            </a:r>
-          </a:p>
-          <a:p>
-            <a:r>
-              <a:t>without the reason.</a:t>
+              <a:t>Supply sources rather than instructing accuracy. "Be accurate" adds authority, not facts.</a:t>
             </a:r>
           </a:p>
           <a:p/>
           <a:p>
             <a:r>
-              <a:t>And practise on your own artifacts. Take your week ten worksheet and ask: which of the nine could</a:t>
-            </a:r>
-          </a:p>
-          <a:p>
-            <a:r>
-              <a:t>hit this system? Where's the human? What did I constrain and why? That's the exam. If you can do</a:t>
-            </a:r>
-          </a:p>
-          <a:p>
-            <a:r>
-              <a:t>that for your own design, you can do it for one I hand you.</a:t>
+              <a:t>Ask for the basis of an answer, then check it. The quote test costs seconds and catches</a:t>
+            </a:r>
+          </a:p>
+          <a:p>
+            <a:r>
+              <a:t>fabrication, over-reading and poisoned summaries all at once.</a:t>
             </a:r>
           </a:p>
           <a:p/>
           <a:p>
             <a:r>
-              <a:t>That's genuinely the most efficient revision available, and it takes about twenty minutes.</a:t>
+              <a:t>Write three questions it cannot answer, before you trust any system. Three questions and five</a:t>
+            </a:r>
+          </a:p>
+          <a:p>
+            <a:r>
+              <a:t>minutes tell you more than a month of ordinary use.</a:t>
+            </a:r>
+          </a:p>
+          <a:p/>
+          <a:p>
+            <a:r>
+              <a:t>Put the human before the irreversible action.</a:t>
+            </a:r>
+          </a:p>
+          <a:p/>
+          <a:p>
+            <a:r>
+              <a:t>Treat everything the system reads as instruction-carrying, not merely as data.</a:t>
+            </a:r>
+          </a:p>
+          <a:p/>
+          <a:p>
+            <a:r>
+              <a:t>Name the person who would be harmed — a category is not an answer.</a:t>
+            </a:r>
+          </a:p>
+          <a:p/>
+          <a:p>
+            <a:r>
+              <a:t>And keep one skill you practise unaided.</a:t>
+            </a:r>
+          </a:p>
+          <a:p/>
+          <a:p>
+            <a:r>
+              <a:t>Eight habits. None of them require a particular tool, and none of them will be obsolete when the</a:t>
+            </a:r>
+          </a:p>
+          <a:p>
+            <a:r>
+              <a:t>tools change.</a:t>
             </a:r>
           </a:p>
         </p:txBody>
@@ -1329,94 +1441,7 @@
           <a:lstStyle/>
           <a:p>
             <a:r>
-              <a:t>Where you started and where you are.</a:t>
-            </a:r>
-          </a:p>
-          <a:p/>
-          <a:p>
-            <a:r>
-              <a:t>In week one, most of you could use these tools. Now you can explain how they work, in plain</a:t>
-            </a:r>
-          </a:p>
-          <a:p>
-            <a:r>
-              <a:t>language, to anyone — a colleague, a supervisor, a patient who asks whether the AI wrote their</a:t>
-            </a:r>
-          </a:p>
-          <a:p>
-            <a:r>
-              <a:t>letter.</a:t>
-            </a:r>
-          </a:p>
-          <a:p/>
-          <a:p>
-            <a:r>
-              <a:t>You've built four things and broken three of them, which is a better ratio than most</a:t>
-            </a:r>
-          </a:p>
-          <a:p>
-            <a:r>
-              <a:t>professional training manages.</a:t>
-            </a:r>
-          </a:p>
-          <a:p/>
-          <a:p>
-            <a:r>
-              <a:t>You know that every failure that matters is invisible in the output. That's the sentence I'd</a:t>
-            </a:r>
-          </a:p>
-          <a:p>
-            <a:r>
-              <a:t>most like to survive this course, because it's what stops you relying on your own perception in</a:t>
-            </a:r>
-          </a:p>
-          <a:p>
-            <a:r>
-              <a:t>a situation where perception doesn't work.</a:t>
-            </a:r>
-          </a:p>
-          <a:p/>
-          <a:p>
-            <a:r>
-              <a:t>And you know what to do about it. Supply sources. Ask for the basis. Test what it cannot know.</a:t>
-            </a:r>
-          </a:p>
-          <a:p>
-            <a:r>
-              <a:t>Keep the human before the irreversible step.</a:t>
-            </a:r>
-          </a:p>
-          <a:p/>
-          <a:p>
-            <a:r>
-              <a:t>The tools will change. Everything in that list survives them, because none of it depends on</a:t>
-            </a:r>
-          </a:p>
-          <a:p>
-            <a:r>
-              <a:t>which product you're using.</a:t>
-            </a:r>
-          </a:p>
-          <a:p/>
-          <a:p>
-            <a:r>
-              <a:t>Thank you for the semester. It's been a genuinely good group, and the cross-disciplinary mix did</a:t>
-            </a:r>
-          </a:p>
-          <a:p>
-            <a:r>
-              <a:t>what I hoped it would — the best questions this term came from people asking about fields that</a:t>
-            </a:r>
-          </a:p>
-          <a:p>
-            <a:r>
-              <a:t>weren't their own.</a:t>
-            </a:r>
-          </a:p>
-          <a:p/>
-          <a:p>
-            <a:r>
-              <a:t>Good luck in the exam. My email is on the next slide and it stays open after the course ends.</a:t>
+              <a:t>Part four. No mysteries.</a:t>
             </a:r>
           </a:p>
         </p:txBody>
@@ -1486,67 +1511,363 @@
           <a:lstStyle/>
           <a:p>
             <a:r>
-              <a:t>Take final questions.</a:t>
+              <a:t>The format: forty multiple-choice questions, two and a half points each, ninety minutes, closed</a:t>
+            </a:r>
+          </a:p>
+          <a:p>
+            <a:r>
+              <a:t>book. Same shape as the midterm, so nothing about the format should surprise you.</a:t>
             </a:r>
           </a:p>
           <a:p/>
           <a:p>
             <a:r>
-              <a:t>Common ones:</a:t>
+              <a:t>Coverage is the whole course, weighted towards weeks six to thirteen — because that's where the</a:t>
+            </a:r>
+          </a:p>
+          <a:p>
+            <a:r>
+              <a:t>judgment lives, and judgment is what I'm assessing.</a:t>
             </a:r>
           </a:p>
           <a:p/>
           <a:p>
             <a:r>
-              <a:t>"Will the exam have questions about specific tools?" — No. Nothing product-specific. Concepts,</a:t>
-            </a:r>
-          </a:p>
-          <a:p>
-            <a:r>
-              <a:t>mechanisms, diagnosis and design only.</a:t>
+              <a:t>Roughly a third is mechanism. Tokens, prediction, context windows, why hallucination happens.</a:t>
+            </a:r>
+          </a:p>
+          <a:p>
+            <a:r>
+              <a:t>These are the questions you can prepare for by understanding rather than memorising.</a:t>
             </a:r>
           </a:p>
           <a:p/>
           <a:p>
             <a:r>
-              <a:t>"Can we see a sample question?" — Yes, and you should have the midterm back to look at. The</a:t>
-            </a:r>
-          </a:p>
-          <a:p>
-            <a:r>
-              <a:t>final is the same style, with more diagnosis and design.</a:t>
+              <a:t>Roughly a third is diagnosis. I give you an answer and its source and ask what's wrong with it.</a:t>
+            </a:r>
+          </a:p>
+          <a:p>
+            <a:r>
+              <a:t>Which of the failure modes is this? These are the questions the build weeks prepared you for,</a:t>
+            </a:r>
+          </a:p>
+          <a:p>
+            <a:r>
+              <a:t>and if you did the building they'll feel easy.</a:t>
             </a:r>
           </a:p>
           <a:p/>
           <a:p>
             <a:r>
-              <a:t>"What should I do next if I want to go further?" — Build something real, in your own field, with</a:t>
-            </a:r>
-          </a:p>
-          <a:p>
-            <a:r>
-              <a:t>someone senior aware of it. That will teach you more than any further course, and you now have</a:t>
-            </a:r>
-          </a:p>
-          <a:p>
-            <a:r>
-              <a:t>the worksheet and the taxonomy to do it responsibly.</a:t>
+              <a:t>And roughly a third is design and judgment. Where does the human go? What should this system not</a:t>
+            </a:r>
+          </a:p>
+          <a:p>
+            <a:r>
+              <a:t>do? Which design rule does this workflow violate?</a:t>
             </a:r>
           </a:p>
           <a:p/>
           <a:p>
             <a:r>
-              <a:t>"Can I contact you after the course?" — Yes. Genuinely. If you're building something in your</a:t>
-            </a:r>
-          </a:p>
-          <a:p>
-            <a:r>
-              <a:t>department and want a second opinion on the design, that's exactly the thing I'd like to hear</a:t>
-            </a:r>
-          </a:p>
-          <a:p>
-            <a:r>
-              <a:t>about.</a:t>
+              <a:t>And the bold line: every "concepts you must be able to define and diagnose" slide is examinable</a:t>
+            </a:r>
+          </a:p>
+          <a:p>
+            <a:r>
+              <a:t>in full. There are seven of them, one per build week. That is your revision list, and it's</a:t>
+            </a:r>
+          </a:p>
+          <a:p>
+            <a:r>
+              <a:t>deliberately short.</a:t>
+            </a:r>
+          </a:p>
+        </p:txBody>
+      </p:sp>
+      <p:sp>
+        <p:nvSpPr>
+          <p:cNvPr id="4" name="Slide Number Placeholder 3"/>
+          <p:cNvSpPr>
+            <a:spLocks noGrp="1"/>
+          </p:cNvSpPr>
+          <p:nvPr>
+            <p:ph type="sldNum" idx="5" sz="quarter"/>
+          </p:nvPr>
+        </p:nvSpPr>
+        <p:spPr/>
+      </p:sp>
+    </p:spTree>
+  </p:cSld>
+  <p:clrMapOvr>
+    <a:masterClrMapping/>
+  </p:clrMapOvr>
+</p:notes>
+</file>
+
+<file path=ppt/notesSlides/notesSlide18.xml><?xml version="1.0" encoding="utf-8"?>
+<p:notes xmlns:a="http://schemas.openxmlformats.org/drawingml/2006/main" xmlns:p="http://schemas.openxmlformats.org/presentationml/2006/main" xmlns:r="http://schemas.openxmlformats.org/officeDocument/2006/relationships">
+  <p:cSld>
+    <p:spTree>
+      <p:nvGrpSpPr>
+        <p:cNvPr id="1" name=""/>
+        <p:cNvGrpSpPr/>
+        <p:nvPr/>
+      </p:nvGrpSpPr>
+      <p:grpSpPr>
+        <a:xfrm>
+          <a:off x="0" y="0"/>
+          <a:ext cx="0" cy="0"/>
+          <a:chOff x="0" y="0"/>
+          <a:chExt cx="0" cy="0"/>
+        </a:xfrm>
+      </p:grpSpPr>
+      <p:sp>
+        <p:nvSpPr>
+          <p:cNvPr id="2" name="Slide Image Placeholder 1"/>
+          <p:cNvSpPr>
+            <a:spLocks noGrp="1"/>
+          </p:cNvSpPr>
+          <p:nvPr>
+            <p:ph type="sldImg" idx="2"/>
+          </p:nvPr>
+        </p:nvSpPr>
+        <p:spPr/>
+      </p:sp>
+      <p:sp>
+        <p:nvSpPr>
+          <p:cNvPr id="3" name="Notes Placeholder 2"/>
+          <p:cNvSpPr>
+            <a:spLocks noGrp="1"/>
+          </p:cNvSpPr>
+          <p:nvPr>
+            <p:ph type="body" idx="3" sz="quarter"/>
+          </p:nvPr>
+        </p:nvSpPr>
+        <p:spPr/>
+        <p:txBody>
+          <a:bodyPr/>
+          <a:lstStyle/>
+          <a:p>
+            <a:r>
+              <a:t>Three pieces of revision advice.</a:t>
+            </a:r>
+          </a:p>
+          <a:p/>
+          <a:p>
+            <a:r>
+              <a:t>Learn the taxonomy by name. Nine failure modes across three groups — failures of the answer,</a:t>
+            </a:r>
+          </a:p>
+          <a:p>
+            <a:r>
+              <a:t>failures of built systems, failures with an author. Most diagnosis questions are asking you to</a:t>
+            </a:r>
+          </a:p>
+          <a:p>
+            <a:r>
+              <a:t>name one. If you can name them reliably, that third of the paper is straightforward.</a:t>
+            </a:r>
+          </a:p>
+          <a:p/>
+          <a:p>
+            <a:r>
+              <a:t>Be able to explain mechanisms, not just state them. Not "it hallucinates" but why — there's no</a:t>
+            </a:r>
+          </a:p>
+          <a:p>
+            <a:r>
+              <a:t>truth check, it optimises plausibility, and in thin coverage plausible and true come apart. The</a:t>
+            </a:r>
+          </a:p>
+          <a:p>
+            <a:r>
+              <a:t>distractors on the mechanism questions are designed to catch people who memorised the label</a:t>
+            </a:r>
+          </a:p>
+          <a:p>
+            <a:r>
+              <a:t>without the reason.</a:t>
+            </a:r>
+          </a:p>
+          <a:p/>
+          <a:p>
+            <a:r>
+              <a:t>And practise on your own artifacts. Take your week ten worksheet and ask: which of the nine could</a:t>
+            </a:r>
+          </a:p>
+          <a:p>
+            <a:r>
+              <a:t>hit this system? Where's the human? What did I constrain and why? That's the exam. If you can do</a:t>
+            </a:r>
+          </a:p>
+          <a:p>
+            <a:r>
+              <a:t>that for your own design, you can do it for one I hand you.</a:t>
+            </a:r>
+          </a:p>
+          <a:p/>
+          <a:p>
+            <a:r>
+              <a:t>That's genuinely the most efficient revision available, and it takes about twenty minutes.</a:t>
+            </a:r>
+          </a:p>
+        </p:txBody>
+      </p:sp>
+      <p:sp>
+        <p:nvSpPr>
+          <p:cNvPr id="4" name="Slide Number Placeholder 3"/>
+          <p:cNvSpPr>
+            <a:spLocks noGrp="1"/>
+          </p:cNvSpPr>
+          <p:nvPr>
+            <p:ph type="sldNum" idx="5" sz="quarter"/>
+          </p:nvPr>
+        </p:nvSpPr>
+        <p:spPr/>
+      </p:sp>
+    </p:spTree>
+  </p:cSld>
+  <p:clrMapOvr>
+    <a:masterClrMapping/>
+  </p:clrMapOvr>
+</p:notes>
+</file>
+
+<file path=ppt/notesSlides/notesSlide19.xml><?xml version="1.0" encoding="utf-8"?>
+<p:notes xmlns:a="http://schemas.openxmlformats.org/drawingml/2006/main" xmlns:p="http://schemas.openxmlformats.org/presentationml/2006/main" xmlns:r="http://schemas.openxmlformats.org/officeDocument/2006/relationships">
+  <p:cSld>
+    <p:spTree>
+      <p:nvGrpSpPr>
+        <p:cNvPr id="1" name=""/>
+        <p:cNvGrpSpPr/>
+        <p:nvPr/>
+      </p:nvGrpSpPr>
+      <p:grpSpPr>
+        <a:xfrm>
+          <a:off x="0" y="0"/>
+          <a:ext cx="0" cy="0"/>
+          <a:chOff x="0" y="0"/>
+          <a:chExt cx="0" cy="0"/>
+        </a:xfrm>
+      </p:grpSpPr>
+      <p:sp>
+        <p:nvSpPr>
+          <p:cNvPr id="2" name="Slide Image Placeholder 1"/>
+          <p:cNvSpPr>
+            <a:spLocks noGrp="1"/>
+          </p:cNvSpPr>
+          <p:nvPr>
+            <p:ph type="sldImg" idx="2"/>
+          </p:nvPr>
+        </p:nvSpPr>
+        <p:spPr/>
+      </p:sp>
+      <p:sp>
+        <p:nvSpPr>
+          <p:cNvPr id="3" name="Notes Placeholder 2"/>
+          <p:cNvSpPr>
+            <a:spLocks noGrp="1"/>
+          </p:cNvSpPr>
+          <p:nvPr>
+            <p:ph type="body" idx="3" sz="quarter"/>
+          </p:nvPr>
+        </p:nvSpPr>
+        <p:spPr/>
+        <p:txBody>
+          <a:bodyPr/>
+          <a:lstStyle/>
+          <a:p>
+            <a:r>
+              <a:t>Where you started and where you are.</a:t>
+            </a:r>
+          </a:p>
+          <a:p/>
+          <a:p>
+            <a:r>
+              <a:t>In week one, most of you could use these tools. Now you can explain how they work, in plain</a:t>
+            </a:r>
+          </a:p>
+          <a:p>
+            <a:r>
+              <a:t>language, to anyone — a colleague, a supervisor, a patient who asks whether the AI wrote their</a:t>
+            </a:r>
+          </a:p>
+          <a:p>
+            <a:r>
+              <a:t>letter.</a:t>
+            </a:r>
+          </a:p>
+          <a:p/>
+          <a:p>
+            <a:r>
+              <a:t>You've built four things and broken three of them, which is a better ratio than most</a:t>
+            </a:r>
+          </a:p>
+          <a:p>
+            <a:r>
+              <a:t>professional training manages.</a:t>
+            </a:r>
+          </a:p>
+          <a:p/>
+          <a:p>
+            <a:r>
+              <a:t>You know that every failure that matters is invisible in the output. That's the sentence I'd</a:t>
+            </a:r>
+          </a:p>
+          <a:p>
+            <a:r>
+              <a:t>most like to survive this course, because it's what stops you relying on your own perception in</a:t>
+            </a:r>
+          </a:p>
+          <a:p>
+            <a:r>
+              <a:t>a situation where perception doesn't work.</a:t>
+            </a:r>
+          </a:p>
+          <a:p/>
+          <a:p>
+            <a:r>
+              <a:t>And you know what to do about it. Supply sources. Ask for the basis. Test what it cannot know.</a:t>
+            </a:r>
+          </a:p>
+          <a:p>
+            <a:r>
+              <a:t>Keep the human before the irreversible step.</a:t>
+            </a:r>
+          </a:p>
+          <a:p/>
+          <a:p>
+            <a:r>
+              <a:t>The tools will change. Everything in that list survives them, because none of it depends on</a:t>
+            </a:r>
+          </a:p>
+          <a:p>
+            <a:r>
+              <a:t>which product you're using.</a:t>
+            </a:r>
+          </a:p>
+          <a:p/>
+          <a:p>
+            <a:r>
+              <a:t>Thank you for the semester. It's been a genuinely good group, and the cross-disciplinary mix did</a:t>
+            </a:r>
+          </a:p>
+          <a:p>
+            <a:r>
+              <a:t>what I hoped it would — the best questions this term came from people asking about fields that</a:t>
+            </a:r>
+          </a:p>
+          <a:p>
+            <a:r>
+              <a:t>weren't their own.</a:t>
+            </a:r>
+          </a:p>
+          <a:p/>
+          <a:p>
+            <a:r>
+              <a:t>Good luck in the exam. My email is on the next slide and it stays open after the course ends.</a:t>
             </a:r>
           </a:p>
         </p:txBody>
@@ -1662,6 +1983,136 @@
           <a:p>
             <a:r>
               <a:t>And exactly what the final exam covers. No surprises.</a:t>
+            </a:r>
+          </a:p>
+        </p:txBody>
+      </p:sp>
+      <p:sp>
+        <p:nvSpPr>
+          <p:cNvPr id="4" name="Slide Number Placeholder 3"/>
+          <p:cNvSpPr>
+            <a:spLocks noGrp="1"/>
+          </p:cNvSpPr>
+          <p:nvPr>
+            <p:ph type="sldNum" idx="5" sz="quarter"/>
+          </p:nvPr>
+        </p:nvSpPr>
+        <p:spPr/>
+      </p:sp>
+    </p:spTree>
+  </p:cSld>
+  <p:clrMapOvr>
+    <a:masterClrMapping/>
+  </p:clrMapOvr>
+</p:notes>
+</file>
+
+<file path=ppt/notesSlides/notesSlide20.xml><?xml version="1.0" encoding="utf-8"?>
+<p:notes xmlns:a="http://schemas.openxmlformats.org/drawingml/2006/main" xmlns:p="http://schemas.openxmlformats.org/presentationml/2006/main" xmlns:r="http://schemas.openxmlformats.org/officeDocument/2006/relationships">
+  <p:cSld>
+    <p:spTree>
+      <p:nvGrpSpPr>
+        <p:cNvPr id="1" name=""/>
+        <p:cNvGrpSpPr/>
+        <p:nvPr/>
+      </p:nvGrpSpPr>
+      <p:grpSpPr>
+        <a:xfrm>
+          <a:off x="0" y="0"/>
+          <a:ext cx="0" cy="0"/>
+          <a:chOff x="0" y="0"/>
+          <a:chExt cx="0" cy="0"/>
+        </a:xfrm>
+      </p:grpSpPr>
+      <p:sp>
+        <p:nvSpPr>
+          <p:cNvPr id="2" name="Slide Image Placeholder 1"/>
+          <p:cNvSpPr>
+            <a:spLocks noGrp="1"/>
+          </p:cNvSpPr>
+          <p:nvPr>
+            <p:ph type="sldImg" idx="2"/>
+          </p:nvPr>
+        </p:nvSpPr>
+        <p:spPr/>
+      </p:sp>
+      <p:sp>
+        <p:nvSpPr>
+          <p:cNvPr id="3" name="Notes Placeholder 2"/>
+          <p:cNvSpPr>
+            <a:spLocks noGrp="1"/>
+          </p:cNvSpPr>
+          <p:nvPr>
+            <p:ph type="body" idx="3" sz="quarter"/>
+          </p:nvPr>
+        </p:nvSpPr>
+        <p:spPr/>
+        <p:txBody>
+          <a:bodyPr/>
+          <a:lstStyle/>
+          <a:p>
+            <a:r>
+              <a:t>Take final questions.</a:t>
+            </a:r>
+          </a:p>
+          <a:p/>
+          <a:p>
+            <a:r>
+              <a:t>Common ones:</a:t>
+            </a:r>
+          </a:p>
+          <a:p/>
+          <a:p>
+            <a:r>
+              <a:t>"Will the exam have questions about specific tools?" — No. Nothing product-specific. Concepts,</a:t>
+            </a:r>
+          </a:p>
+          <a:p>
+            <a:r>
+              <a:t>mechanisms, diagnosis and design only.</a:t>
+            </a:r>
+          </a:p>
+          <a:p/>
+          <a:p>
+            <a:r>
+              <a:t>"Can we see a sample question?" — Yes, and you should have the midterm back to look at. The</a:t>
+            </a:r>
+          </a:p>
+          <a:p>
+            <a:r>
+              <a:t>final is the same style, with more diagnosis and design.</a:t>
+            </a:r>
+          </a:p>
+          <a:p/>
+          <a:p>
+            <a:r>
+              <a:t>"What should I do next if I want to go further?" — Build something real, in your own field, with</a:t>
+            </a:r>
+          </a:p>
+          <a:p>
+            <a:r>
+              <a:t>someone senior aware of it. That will teach you more than any further course, and you now have</a:t>
+            </a:r>
+          </a:p>
+          <a:p>
+            <a:r>
+              <a:t>the worksheet and the taxonomy to do it responsibly.</a:t>
+            </a:r>
+          </a:p>
+          <a:p/>
+          <a:p>
+            <a:r>
+              <a:t>"Can I contact you after the course?" — Yes. Genuinely. If you're building something in your</a:t>
+            </a:r>
+          </a:p>
+          <a:p>
+            <a:r>
+              <a:t>department and want a second opinion on the design, that's exactly the thing I'd like to hear</a:t>
+            </a:r>
+          </a:p>
+          <a:p>
+            <a:r>
+              <a:t>about.</a:t>
             </a:r>
           </a:p>
         </p:txBody>
@@ -6328,7 +6779,7 @@
                 </a:solidFill>
                 <a:latin typeface="Calibri Light"/>
               </a:rPr>
-              <a:t>What to Carry Into Practice</a:t>
+              <a:t>The Semester in One Picture</a:t>
             </a:r>
           </a:p>
         </p:txBody>
@@ -6379,14 +6830,803 @@
       </p:sp>
       <p:sp>
         <p:nvSpPr>
-          <p:cNvPr id="4" name="TextBox 3"/>
+          <p:cNvPr id="4" name="Rectangle 3"/>
+          <p:cNvSpPr/>
+          <p:nvPr/>
+        </p:nvSpPr>
+        <p:spPr>
+          <a:xfrm>
+            <a:off x="1691640" y="3429000"/>
+            <a:ext cx="8808415" cy="31750"/>
+          </a:xfrm>
+          <a:prstGeom prst="rect">
+            <a:avLst/>
+          </a:prstGeom>
+          <a:solidFill>
+            <a:srgbClr val="C9D4DE"/>
+          </a:solidFill>
+          <a:ln>
+            <a:noFill/>
+          </a:ln>
+          <a:effectLst/>
+        </p:spPr>
+        <p:style>
+          <a:lnRef idx="1">
+            <a:schemeClr val="accent1"/>
+          </a:lnRef>
+          <a:fillRef idx="3">
+            <a:schemeClr val="accent1"/>
+          </a:fillRef>
+          <a:effectRef idx="2">
+            <a:schemeClr val="accent1"/>
+          </a:effectRef>
+          <a:fontRef idx="minor">
+            <a:schemeClr val="lt1"/>
+          </a:fontRef>
+        </p:style>
+        <p:txBody>
+          <a:bodyPr rtlCol="0" anchor="ctr"/>
+          <a:lstStyle/>
+          <a:p>
+            <a:pPr algn="ctr"/>
+          </a:p>
+        </p:txBody>
+      </p:sp>
+      <p:sp>
+        <p:nvSpPr>
+          <p:cNvPr id="5" name="Rounded Rectangle 4"/>
+          <p:cNvSpPr/>
+          <p:nvPr/>
+        </p:nvSpPr>
+        <p:spPr>
+          <a:xfrm>
+            <a:off x="1613916" y="3363976"/>
+            <a:ext cx="155448" cy="155448"/>
+          </a:xfrm>
+          <a:prstGeom prst="roundRect">
+            <a:avLst>
+              <a:gd name="adj" fmla="val 10000"/>
+            </a:avLst>
+          </a:prstGeom>
+          <a:solidFill>
+            <a:srgbClr val="0F766E"/>
+          </a:solidFill>
+          <a:ln>
+            <a:noFill/>
+          </a:ln>
+          <a:effectLst/>
+        </p:spPr>
+        <p:style>
+          <a:lnRef idx="1">
+            <a:schemeClr val="accent1"/>
+          </a:lnRef>
+          <a:fillRef idx="3">
+            <a:schemeClr val="accent1"/>
+          </a:fillRef>
+          <a:effectRef idx="2">
+            <a:schemeClr val="accent1"/>
+          </a:effectRef>
+          <a:fontRef idx="minor">
+            <a:schemeClr val="lt1"/>
+          </a:fontRef>
+        </p:style>
+        <p:txBody>
+          <a:bodyPr rtlCol="0" anchor="ctr"/>
+          <a:lstStyle/>
+          <a:p>
+            <a:pPr algn="ctr"/>
+          </a:p>
+        </p:txBody>
+      </p:sp>
+      <p:sp>
+        <p:nvSpPr>
+          <p:cNvPr id="6" name="TextBox 5"/>
           <p:cNvSpPr txBox="1"/>
           <p:nvPr/>
         </p:nvSpPr>
         <p:spPr>
           <a:xfrm>
-            <a:off x="777240" y="1783080"/>
-            <a:ext cx="10637215" cy="4343400"/>
+            <a:off x="777240" y="1965960"/>
+            <a:ext cx="1828800" cy="1280160"/>
+          </a:xfrm>
+          <a:prstGeom prst="rect">
+            <a:avLst/>
+          </a:prstGeom>
+          <a:noFill/>
+        </p:spPr>
+        <p:txBody>
+          <a:bodyPr wrap="square" lIns="0" rIns="0" tIns="0" bIns="0" anchor="b">
+            <a:spAutoFit/>
+          </a:bodyPr>
+          <a:lstStyle/>
+          <a:p>
+            <a:pPr algn="ctr">
+              <a:lnSpc>
+                <a:spcPct val="105000"/>
+              </a:lnSpc>
+              <a:spcAft>
+                <a:spcPts val="200"/>
+              </a:spcAft>
+            </a:pPr>
+            <a:r>
+              <a:rPr sz="1700" b="1" i="0">
+                <a:solidFill>
+                  <a:srgbClr val="0F766E"/>
+                </a:solidFill>
+                <a:latin typeface="Calibri"/>
+              </a:rPr>
+              <a:t>1–3</a:t>
+            </a:r>
+          </a:p>
+          <a:p>
+            <a:pPr algn="ctr">
+              <a:lnSpc>
+                <a:spcPct val="105000"/>
+              </a:lnSpc>
+              <a:spcAft>
+                <a:spcPts val="200"/>
+              </a:spcAft>
+            </a:pPr>
+            <a:r>
+              <a:rPr sz="1400" b="1" i="0">
+                <a:solidFill>
+                  <a:srgbClr val="1F2937"/>
+                </a:solidFill>
+                <a:latin typeface="Calibri"/>
+              </a:rPr>
+              <a:t>Understand</a:t>
+            </a:r>
+          </a:p>
+        </p:txBody>
+      </p:sp>
+      <p:sp>
+        <p:nvSpPr>
+          <p:cNvPr id="7" name="TextBox 6"/>
+          <p:cNvSpPr txBox="1"/>
+          <p:nvPr/>
+        </p:nvSpPr>
+        <p:spPr>
+          <a:xfrm>
+            <a:off x="777240" y="3703320"/>
+            <a:ext cx="1828800" cy="1554480"/>
+          </a:xfrm>
+          <a:prstGeom prst="rect">
+            <a:avLst/>
+          </a:prstGeom>
+          <a:noFill/>
+        </p:spPr>
+        <p:txBody>
+          <a:bodyPr wrap="square" lIns="0" rIns="0" tIns="0" bIns="0" anchor="t">
+            <a:spAutoFit/>
+          </a:bodyPr>
+          <a:lstStyle/>
+          <a:p>
+            <a:pPr algn="ctr">
+              <a:lnSpc>
+                <a:spcPct val="105000"/>
+              </a:lnSpc>
+              <a:spcAft>
+                <a:spcPts val="200"/>
+              </a:spcAft>
+            </a:pPr>
+            <a:r>
+              <a:rPr sz="1200" b="0" i="0">
+                <a:solidFill>
+                  <a:srgbClr val="333D4B"/>
+                </a:solidFill>
+                <a:latin typeface="Calibri"/>
+              </a:rPr>
+              <a:t>What it is, where it came from, why it is confident and wrong</a:t>
+            </a:r>
+          </a:p>
+        </p:txBody>
+      </p:sp>
+      <p:sp>
+        <p:nvSpPr>
+          <p:cNvPr id="8" name="Rounded Rectangle 7"/>
+          <p:cNvSpPr/>
+          <p:nvPr/>
+        </p:nvSpPr>
+        <p:spPr>
+          <a:xfrm>
+            <a:off x="3816019" y="3363976"/>
+            <a:ext cx="155448" cy="155448"/>
+          </a:xfrm>
+          <a:prstGeom prst="roundRect">
+            <a:avLst>
+              <a:gd name="adj" fmla="val 10000"/>
+            </a:avLst>
+          </a:prstGeom>
+          <a:solidFill>
+            <a:srgbClr val="0F766E"/>
+          </a:solidFill>
+          <a:ln>
+            <a:noFill/>
+          </a:ln>
+          <a:effectLst/>
+        </p:spPr>
+        <p:style>
+          <a:lnRef idx="1">
+            <a:schemeClr val="accent1"/>
+          </a:lnRef>
+          <a:fillRef idx="3">
+            <a:schemeClr val="accent1"/>
+          </a:fillRef>
+          <a:effectRef idx="2">
+            <a:schemeClr val="accent1"/>
+          </a:effectRef>
+          <a:fontRef idx="minor">
+            <a:schemeClr val="lt1"/>
+          </a:fontRef>
+        </p:style>
+        <p:txBody>
+          <a:bodyPr rtlCol="0" anchor="ctr"/>
+          <a:lstStyle/>
+          <a:p>
+            <a:pPr algn="ctr"/>
+          </a:p>
+        </p:txBody>
+      </p:sp>
+      <p:sp>
+        <p:nvSpPr>
+          <p:cNvPr id="9" name="TextBox 8"/>
+          <p:cNvSpPr txBox="1"/>
+          <p:nvPr/>
+        </p:nvSpPr>
+        <p:spPr>
+          <a:xfrm>
+            <a:off x="2979343" y="1965960"/>
+            <a:ext cx="1828800" cy="1280160"/>
+          </a:xfrm>
+          <a:prstGeom prst="rect">
+            <a:avLst/>
+          </a:prstGeom>
+          <a:noFill/>
+        </p:spPr>
+        <p:txBody>
+          <a:bodyPr wrap="square" lIns="0" rIns="0" tIns="0" bIns="0" anchor="b">
+            <a:spAutoFit/>
+          </a:bodyPr>
+          <a:lstStyle/>
+          <a:p>
+            <a:pPr algn="ctr">
+              <a:lnSpc>
+                <a:spcPct val="105000"/>
+              </a:lnSpc>
+              <a:spcAft>
+                <a:spcPts val="200"/>
+              </a:spcAft>
+            </a:pPr>
+            <a:r>
+              <a:rPr sz="1700" b="1" i="0">
+                <a:solidFill>
+                  <a:srgbClr val="0F766E"/>
+                </a:solidFill>
+                <a:latin typeface="Calibri"/>
+              </a:rPr>
+              <a:t>4–5</a:t>
+            </a:r>
+          </a:p>
+          <a:p>
+            <a:pPr algn="ctr">
+              <a:lnSpc>
+                <a:spcPct val="105000"/>
+              </a:lnSpc>
+              <a:spcAft>
+                <a:spcPts val="200"/>
+              </a:spcAft>
+            </a:pPr>
+            <a:r>
+              <a:rPr sz="1400" b="1" i="0">
+                <a:solidFill>
+                  <a:srgbClr val="1F2937"/>
+                </a:solidFill>
+                <a:latin typeface="Calibri"/>
+              </a:rPr>
+              <a:t>Instruct</a:t>
+            </a:r>
+          </a:p>
+        </p:txBody>
+      </p:sp>
+      <p:sp>
+        <p:nvSpPr>
+          <p:cNvPr id="10" name="TextBox 9"/>
+          <p:cNvSpPr txBox="1"/>
+          <p:nvPr/>
+        </p:nvSpPr>
+        <p:spPr>
+          <a:xfrm>
+            <a:off x="2979343" y="3703320"/>
+            <a:ext cx="1828800" cy="1554480"/>
+          </a:xfrm>
+          <a:prstGeom prst="rect">
+            <a:avLst/>
+          </a:prstGeom>
+          <a:noFill/>
+        </p:spPr>
+        <p:txBody>
+          <a:bodyPr wrap="square" lIns="0" rIns="0" tIns="0" bIns="0" anchor="t">
+            <a:spAutoFit/>
+          </a:bodyPr>
+          <a:lstStyle/>
+          <a:p>
+            <a:pPr algn="ctr">
+              <a:lnSpc>
+                <a:spcPct val="105000"/>
+              </a:lnSpc>
+              <a:spcAft>
+                <a:spcPts val="200"/>
+              </a:spcAft>
+            </a:pPr>
+            <a:r>
+              <a:rPr sz="1200" b="0" i="0">
+                <a:solidFill>
+                  <a:srgbClr val="333D4B"/>
+                </a:solidFill>
+                <a:latin typeface="Calibri"/>
+              </a:rPr>
+              <a:t>Four levers, register, structural contracts and fallbacks</a:t>
+            </a:r>
+          </a:p>
+        </p:txBody>
+      </p:sp>
+      <p:sp>
+        <p:nvSpPr>
+          <p:cNvPr id="11" name="Rounded Rectangle 10"/>
+          <p:cNvSpPr/>
+          <p:nvPr/>
+        </p:nvSpPr>
+        <p:spPr>
+          <a:xfrm>
+            <a:off x="6018123" y="3363976"/>
+            <a:ext cx="155448" cy="155448"/>
+          </a:xfrm>
+          <a:prstGeom prst="roundRect">
+            <a:avLst>
+              <a:gd name="adj" fmla="val 10000"/>
+            </a:avLst>
+          </a:prstGeom>
+          <a:solidFill>
+            <a:srgbClr val="0F766E"/>
+          </a:solidFill>
+          <a:ln>
+            <a:noFill/>
+          </a:ln>
+          <a:effectLst/>
+        </p:spPr>
+        <p:style>
+          <a:lnRef idx="1">
+            <a:schemeClr val="accent1"/>
+          </a:lnRef>
+          <a:fillRef idx="3">
+            <a:schemeClr val="accent1"/>
+          </a:fillRef>
+          <a:effectRef idx="2">
+            <a:schemeClr val="accent1"/>
+          </a:effectRef>
+          <a:fontRef idx="minor">
+            <a:schemeClr val="lt1"/>
+          </a:fontRef>
+        </p:style>
+        <p:txBody>
+          <a:bodyPr rtlCol="0" anchor="ctr"/>
+          <a:lstStyle/>
+          <a:p>
+            <a:pPr algn="ctr"/>
+          </a:p>
+        </p:txBody>
+      </p:sp>
+      <p:sp>
+        <p:nvSpPr>
+          <p:cNvPr id="12" name="TextBox 11"/>
+          <p:cNvSpPr txBox="1"/>
+          <p:nvPr/>
+        </p:nvSpPr>
+        <p:spPr>
+          <a:xfrm>
+            <a:off x="5181447" y="1965960"/>
+            <a:ext cx="1828800" cy="1280160"/>
+          </a:xfrm>
+          <a:prstGeom prst="rect">
+            <a:avLst/>
+          </a:prstGeom>
+          <a:noFill/>
+        </p:spPr>
+        <p:txBody>
+          <a:bodyPr wrap="square" lIns="0" rIns="0" tIns="0" bIns="0" anchor="b">
+            <a:spAutoFit/>
+          </a:bodyPr>
+          <a:lstStyle/>
+          <a:p>
+            <a:pPr algn="ctr">
+              <a:lnSpc>
+                <a:spcPct val="105000"/>
+              </a:lnSpc>
+              <a:spcAft>
+                <a:spcPts val="200"/>
+              </a:spcAft>
+            </a:pPr>
+            <a:r>
+              <a:rPr sz="1700" b="1" i="0">
+                <a:solidFill>
+                  <a:srgbClr val="0F766E"/>
+                </a:solidFill>
+                <a:latin typeface="Calibri"/>
+              </a:rPr>
+              <a:t>6–8</a:t>
+            </a:r>
+          </a:p>
+          <a:p>
+            <a:pPr algn="ctr">
+              <a:lnSpc>
+                <a:spcPct val="105000"/>
+              </a:lnSpc>
+              <a:spcAft>
+                <a:spcPts val="200"/>
+              </a:spcAft>
+            </a:pPr>
+            <a:r>
+              <a:rPr sz="1400" b="1" i="0">
+                <a:solidFill>
+                  <a:srgbClr val="1F2937"/>
+                </a:solidFill>
+                <a:latin typeface="Calibri"/>
+              </a:rPr>
+              <a:t>Build &amp; test</a:t>
+            </a:r>
+          </a:p>
+        </p:txBody>
+      </p:sp>
+      <p:sp>
+        <p:nvSpPr>
+          <p:cNvPr id="13" name="TextBox 12"/>
+          <p:cNvSpPr txBox="1"/>
+          <p:nvPr/>
+        </p:nvSpPr>
+        <p:spPr>
+          <a:xfrm>
+            <a:off x="5181447" y="3703320"/>
+            <a:ext cx="1828800" cy="1554480"/>
+          </a:xfrm>
+          <a:prstGeom prst="rect">
+            <a:avLst/>
+          </a:prstGeom>
+          <a:noFill/>
+        </p:spPr>
+        <p:txBody>
+          <a:bodyPr wrap="square" lIns="0" rIns="0" tIns="0" bIns="0" anchor="t">
+            <a:spAutoFit/>
+          </a:bodyPr>
+          <a:lstStyle/>
+          <a:p>
+            <a:pPr algn="ctr">
+              <a:lnSpc>
+                <a:spcPct val="105000"/>
+              </a:lnSpc>
+              <a:spcAft>
+                <a:spcPts val="200"/>
+              </a:spcAft>
+            </a:pPr>
+            <a:r>
+              <a:rPr sz="1200" b="0" i="0">
+                <a:solidFill>
+                  <a:srgbClr val="333D4B"/>
+                </a:solidFill>
+                <a:latin typeface="Calibri"/>
+              </a:rPr>
+              <a:t>Micro-Tool, Grounded Assistant, Test Set</a:t>
+            </a:r>
+          </a:p>
+        </p:txBody>
+      </p:sp>
+      <p:sp>
+        <p:nvSpPr>
+          <p:cNvPr id="14" name="Rounded Rectangle 13"/>
+          <p:cNvSpPr/>
+          <p:nvPr/>
+        </p:nvSpPr>
+        <p:spPr>
+          <a:xfrm>
+            <a:off x="8220227" y="3363976"/>
+            <a:ext cx="155448" cy="155448"/>
+          </a:xfrm>
+          <a:prstGeom prst="roundRect">
+            <a:avLst>
+              <a:gd name="adj" fmla="val 10000"/>
+            </a:avLst>
+          </a:prstGeom>
+          <a:solidFill>
+            <a:srgbClr val="0F766E"/>
+          </a:solidFill>
+          <a:ln>
+            <a:noFill/>
+          </a:ln>
+          <a:effectLst/>
+        </p:spPr>
+        <p:style>
+          <a:lnRef idx="1">
+            <a:schemeClr val="accent1"/>
+          </a:lnRef>
+          <a:fillRef idx="3">
+            <a:schemeClr val="accent1"/>
+          </a:fillRef>
+          <a:effectRef idx="2">
+            <a:schemeClr val="accent1"/>
+          </a:effectRef>
+          <a:fontRef idx="minor">
+            <a:schemeClr val="lt1"/>
+          </a:fontRef>
+        </p:style>
+        <p:txBody>
+          <a:bodyPr rtlCol="0" anchor="ctr"/>
+          <a:lstStyle/>
+          <a:p>
+            <a:pPr algn="ctr"/>
+          </a:p>
+        </p:txBody>
+      </p:sp>
+      <p:sp>
+        <p:nvSpPr>
+          <p:cNvPr id="15" name="TextBox 14"/>
+          <p:cNvSpPr txBox="1"/>
+          <p:nvPr/>
+        </p:nvSpPr>
+        <p:spPr>
+          <a:xfrm>
+            <a:off x="7383551" y="1965960"/>
+            <a:ext cx="1828800" cy="1280160"/>
+          </a:xfrm>
+          <a:prstGeom prst="rect">
+            <a:avLst/>
+          </a:prstGeom>
+          <a:noFill/>
+        </p:spPr>
+        <p:txBody>
+          <a:bodyPr wrap="square" lIns="0" rIns="0" tIns="0" bIns="0" anchor="b">
+            <a:spAutoFit/>
+          </a:bodyPr>
+          <a:lstStyle/>
+          <a:p>
+            <a:pPr algn="ctr">
+              <a:lnSpc>
+                <a:spcPct val="105000"/>
+              </a:lnSpc>
+              <a:spcAft>
+                <a:spcPts val="200"/>
+              </a:spcAft>
+            </a:pPr>
+            <a:r>
+              <a:rPr sz="1700" b="1" i="0">
+                <a:solidFill>
+                  <a:srgbClr val="0F766E"/>
+                </a:solidFill>
+                <a:latin typeface="Calibri"/>
+              </a:rPr>
+              <a:t>9–11</a:t>
+            </a:r>
+          </a:p>
+          <a:p>
+            <a:pPr algn="ctr">
+              <a:lnSpc>
+                <a:spcPct val="105000"/>
+              </a:lnSpc>
+              <a:spcAft>
+                <a:spcPts val="200"/>
+              </a:spcAft>
+            </a:pPr>
+            <a:r>
+              <a:rPr sz="1400" b="1" i="0">
+                <a:solidFill>
+                  <a:srgbClr val="1F2937"/>
+                </a:solidFill>
+                <a:latin typeface="Calibri"/>
+              </a:rPr>
+              <a:t>Scale &amp; adapt</a:t>
+            </a:r>
+          </a:p>
+        </p:txBody>
+      </p:sp>
+      <p:sp>
+        <p:nvSpPr>
+          <p:cNvPr id="16" name="TextBox 15"/>
+          <p:cNvSpPr txBox="1"/>
+          <p:nvPr/>
+        </p:nvSpPr>
+        <p:spPr>
+          <a:xfrm>
+            <a:off x="7383551" y="3703320"/>
+            <a:ext cx="1828800" cy="1554480"/>
+          </a:xfrm>
+          <a:prstGeom prst="rect">
+            <a:avLst/>
+          </a:prstGeom>
+          <a:noFill/>
+        </p:spPr>
+        <p:txBody>
+          <a:bodyPr wrap="square" lIns="0" rIns="0" tIns="0" bIns="0" anchor="t">
+            <a:spAutoFit/>
+          </a:bodyPr>
+          <a:lstStyle/>
+          <a:p>
+            <a:pPr algn="ctr">
+              <a:lnSpc>
+                <a:spcPct val="105000"/>
+              </a:lnSpc>
+              <a:spcAft>
+                <a:spcPts val="200"/>
+              </a:spcAft>
+            </a:pPr>
+            <a:r>
+              <a:rPr sz="1200" b="0" i="0">
+                <a:solidFill>
+                  <a:srgbClr val="333D4B"/>
+                </a:solidFill>
+                <a:latin typeface="Calibri"/>
+              </a:rPr>
+              <a:t>Automation Chain, Field Build, Domain Pack</a:t>
+            </a:r>
+          </a:p>
+        </p:txBody>
+      </p:sp>
+      <p:sp>
+        <p:nvSpPr>
+          <p:cNvPr id="17" name="Rounded Rectangle 16"/>
+          <p:cNvSpPr/>
+          <p:nvPr/>
+        </p:nvSpPr>
+        <p:spPr>
+          <a:xfrm>
+            <a:off x="10422331" y="3363976"/>
+            <a:ext cx="155448" cy="155448"/>
+          </a:xfrm>
+          <a:prstGeom prst="roundRect">
+            <a:avLst>
+              <a:gd name="adj" fmla="val 10000"/>
+            </a:avLst>
+          </a:prstGeom>
+          <a:solidFill>
+            <a:srgbClr val="0F766E"/>
+          </a:solidFill>
+          <a:ln>
+            <a:noFill/>
+          </a:ln>
+          <a:effectLst/>
+        </p:spPr>
+        <p:style>
+          <a:lnRef idx="1">
+            <a:schemeClr val="accent1"/>
+          </a:lnRef>
+          <a:fillRef idx="3">
+            <a:schemeClr val="accent1"/>
+          </a:fillRef>
+          <a:effectRef idx="2">
+            <a:schemeClr val="accent1"/>
+          </a:effectRef>
+          <a:fontRef idx="minor">
+            <a:schemeClr val="lt1"/>
+          </a:fontRef>
+        </p:style>
+        <p:txBody>
+          <a:bodyPr rtlCol="0" anchor="ctr"/>
+          <a:lstStyle/>
+          <a:p>
+            <a:pPr algn="ctr"/>
+          </a:p>
+        </p:txBody>
+      </p:sp>
+      <p:sp>
+        <p:nvSpPr>
+          <p:cNvPr id="18" name="TextBox 17"/>
+          <p:cNvSpPr txBox="1"/>
+          <p:nvPr/>
+        </p:nvSpPr>
+        <p:spPr>
+          <a:xfrm>
+            <a:off x="9585655" y="1965960"/>
+            <a:ext cx="1828800" cy="1280160"/>
+          </a:xfrm>
+          <a:prstGeom prst="rect">
+            <a:avLst/>
+          </a:prstGeom>
+          <a:noFill/>
+        </p:spPr>
+        <p:txBody>
+          <a:bodyPr wrap="square" lIns="0" rIns="0" tIns="0" bIns="0" anchor="b">
+            <a:spAutoFit/>
+          </a:bodyPr>
+          <a:lstStyle/>
+          <a:p>
+            <a:pPr algn="ctr">
+              <a:lnSpc>
+                <a:spcPct val="105000"/>
+              </a:lnSpc>
+              <a:spcAft>
+                <a:spcPts val="200"/>
+              </a:spcAft>
+            </a:pPr>
+            <a:r>
+              <a:rPr sz="1700" b="1" i="0">
+                <a:solidFill>
+                  <a:srgbClr val="0F766E"/>
+                </a:solidFill>
+                <a:latin typeface="Calibri"/>
+              </a:rPr>
+              <a:t>12–14</a:t>
+            </a:r>
+          </a:p>
+          <a:p>
+            <a:pPr algn="ctr">
+              <a:lnSpc>
+                <a:spcPct val="105000"/>
+              </a:lnSpc>
+              <a:spcAft>
+                <a:spcPts val="200"/>
+              </a:spcAft>
+            </a:pPr>
+            <a:r>
+              <a:rPr sz="1400" b="1" i="0">
+                <a:solidFill>
+                  <a:srgbClr val="1F2937"/>
+                </a:solidFill>
+                <a:latin typeface="Calibri"/>
+              </a:rPr>
+              <a:t>Defend &amp; judge</a:t>
+            </a:r>
+          </a:p>
+        </p:txBody>
+      </p:sp>
+      <p:sp>
+        <p:nvSpPr>
+          <p:cNvPr id="19" name="TextBox 18"/>
+          <p:cNvSpPr txBox="1"/>
+          <p:nvPr/>
+        </p:nvSpPr>
+        <p:spPr>
+          <a:xfrm>
+            <a:off x="9585655" y="3703320"/>
+            <a:ext cx="1828800" cy="1554480"/>
+          </a:xfrm>
+          <a:prstGeom prst="rect">
+            <a:avLst/>
+          </a:prstGeom>
+          <a:noFill/>
+        </p:spPr>
+        <p:txBody>
+          <a:bodyPr wrap="square" lIns="0" rIns="0" tIns="0" bIns="0" anchor="t">
+            <a:spAutoFit/>
+          </a:bodyPr>
+          <a:lstStyle/>
+          <a:p>
+            <a:pPr algn="ctr">
+              <a:lnSpc>
+                <a:spcPct val="105000"/>
+              </a:lnSpc>
+              <a:spcAft>
+                <a:spcPts val="200"/>
+              </a:spcAft>
+            </a:pPr>
+            <a:r>
+              <a:rPr sz="1200" b="0" i="0">
+                <a:solidFill>
+                  <a:srgbClr val="333D4B"/>
+                </a:solidFill>
+                <a:latin typeface="Calibri"/>
+              </a:rPr>
+              <a:t>Injection, ethics, synthesis</a:t>
+            </a:r>
+          </a:p>
+        </p:txBody>
+      </p:sp>
+      <p:sp>
+        <p:nvSpPr>
+          <p:cNvPr id="20" name="TextBox 19"/>
+          <p:cNvSpPr txBox="1"/>
+          <p:nvPr/>
+        </p:nvSpPr>
+        <p:spPr>
+          <a:xfrm>
+            <a:off x="777240" y="6355080"/>
+            <a:ext cx="10637215" cy="274320"/>
           </a:xfrm>
           <a:prstGeom prst="rect">
             <a:avLst/>
@@ -6399,188 +7639,13 @@
           </a:bodyPr>
           <a:lstStyle/>
           <a:p>
-            <a:pPr lvl="1">
-              <a:lnSpc>
-                <a:spcPct val="115000"/>
-              </a:lnSpc>
-              <a:spcAft>
-                <a:spcPts val="500"/>
-              </a:spcAft>
-            </a:pPr>
-            <a:r>
-              <a:rPr sz="1600" b="0" i="0">
-                <a:solidFill>
-                  <a:srgbClr val="333D4B"/>
+            <a:r>
+              <a:rPr sz="1000" b="0" i="0">
+                <a:solidFill>
+                  <a:srgbClr val="6B7787"/>
                 </a:solidFill>
                 <a:latin typeface="Calibri"/>
               </a:rPr>
-              <a:t>—  Ask what is being measured, and what you are certifying</a:t>
-            </a:r>
-          </a:p>
-          <a:p>
-            <a:pPr lvl="1">
-              <a:lnSpc>
-                <a:spcPct val="115000"/>
-              </a:lnSpc>
-              <a:spcAft>
-                <a:spcPts val="500"/>
-              </a:spcAft>
-            </a:pPr>
-            <a:r>
-              <a:rPr sz="1600" b="0" i="0">
-                <a:solidFill>
-                  <a:srgbClr val="333D4B"/>
-                </a:solidFill>
-                <a:latin typeface="Calibri"/>
-              </a:rPr>
-              <a:t>—  Supply sources rather than instructing accuracy</a:t>
-            </a:r>
-          </a:p>
-          <a:p>
-            <a:pPr lvl="1">
-              <a:lnSpc>
-                <a:spcPct val="115000"/>
-              </a:lnSpc>
-              <a:spcAft>
-                <a:spcPts val="500"/>
-              </a:spcAft>
-            </a:pPr>
-            <a:r>
-              <a:rPr sz="1600" b="0" i="0">
-                <a:solidFill>
-                  <a:srgbClr val="333D4B"/>
-                </a:solidFill>
-                <a:latin typeface="Calibri"/>
-              </a:rPr>
-              <a:t>—  Ask for the basis of an answer, then check it — the quote test costs seconds</a:t>
-            </a:r>
-          </a:p>
-          <a:p>
-            <a:pPr lvl="1">
-              <a:lnSpc>
-                <a:spcPct val="115000"/>
-              </a:lnSpc>
-              <a:spcAft>
-                <a:spcPts val="500"/>
-              </a:spcAft>
-            </a:pPr>
-            <a:r>
-              <a:rPr sz="1600" b="0" i="0">
-                <a:solidFill>
-                  <a:srgbClr val="333D4B"/>
-                </a:solidFill>
-                <a:latin typeface="Calibri"/>
-              </a:rPr>
-              <a:t>—  Write three questions it cannot answer, before you trust any system</a:t>
-            </a:r>
-          </a:p>
-          <a:p>
-            <a:pPr lvl="1">
-              <a:lnSpc>
-                <a:spcPct val="115000"/>
-              </a:lnSpc>
-              <a:spcAft>
-                <a:spcPts val="500"/>
-              </a:spcAft>
-            </a:pPr>
-            <a:r>
-              <a:rPr sz="1600" b="0" i="0">
-                <a:solidFill>
-                  <a:srgbClr val="333D4B"/>
-                </a:solidFill>
-                <a:latin typeface="Calibri"/>
-              </a:rPr>
-              <a:t>—  Put the human before the irreversible action</a:t>
-            </a:r>
-          </a:p>
-          <a:p>
-            <a:pPr lvl="1">
-              <a:lnSpc>
-                <a:spcPct val="115000"/>
-              </a:lnSpc>
-              <a:spcAft>
-                <a:spcPts val="500"/>
-              </a:spcAft>
-            </a:pPr>
-            <a:r>
-              <a:rPr sz="1600" b="0" i="0">
-                <a:solidFill>
-                  <a:srgbClr val="333D4B"/>
-                </a:solidFill>
-                <a:latin typeface="Calibri"/>
-              </a:rPr>
-              <a:t>—  Treat everything the system reads as instruction-carrying</a:t>
-            </a:r>
-          </a:p>
-          <a:p>
-            <a:pPr lvl="1">
-              <a:lnSpc>
-                <a:spcPct val="115000"/>
-              </a:lnSpc>
-              <a:spcAft>
-                <a:spcPts val="500"/>
-              </a:spcAft>
-            </a:pPr>
-            <a:r>
-              <a:rPr sz="1600" b="0" i="0">
-                <a:solidFill>
-                  <a:srgbClr val="333D4B"/>
-                </a:solidFill>
-                <a:latin typeface="Calibri"/>
-              </a:rPr>
-              <a:t>—  Name the person who would be harmed</a:t>
-            </a:r>
-          </a:p>
-          <a:p>
-            <a:pPr lvl="1">
-              <a:lnSpc>
-                <a:spcPct val="115000"/>
-              </a:lnSpc>
-              <a:spcAft>
-                <a:spcPts val="500"/>
-              </a:spcAft>
-            </a:pPr>
-            <a:r>
-              <a:rPr sz="1600" b="0" i="0">
-                <a:solidFill>
-                  <a:srgbClr val="333D4B"/>
-                </a:solidFill>
-                <a:latin typeface="Calibri"/>
-              </a:rPr>
-              <a:t>—  Keep one skill you practise unaided</a:t>
-            </a:r>
-          </a:p>
-        </p:txBody>
-      </p:sp>
-      <p:sp>
-        <p:nvSpPr>
-          <p:cNvPr id="5" name="TextBox 4"/>
-          <p:cNvSpPr txBox="1"/>
-          <p:nvPr/>
-        </p:nvSpPr>
-        <p:spPr>
-          <a:xfrm>
-            <a:off x="777240" y="6355080"/>
-            <a:ext cx="10637215" cy="274320"/>
-          </a:xfrm>
-          <a:prstGeom prst="rect">
-            <a:avLst/>
-          </a:prstGeom>
-          <a:noFill/>
-        </p:spPr>
-        <p:txBody>
-          <a:bodyPr wrap="square" lIns="0" rIns="0" tIns="0" bIns="0">
-            <a:spAutoFit/>
-          </a:bodyPr>
-          <a:lstStyle/>
-          <a:p>
-            <a:r>
-              <a:rPr sz="1000" b="0" i="0">
-                <a:solidFill>
-                  <a:srgbClr val="6B7787"/>
-                </a:solidFill>
-                <a:latin typeface="Calibri"/>
-              </a:rPr>
               <a:t>Week 14  ·  Prompt Engineering and Large Language Models</a:t>
             </a:r>
           </a:p>
@@ -6588,7 +7653,7 @@
       </p:sp>
       <p:sp>
         <p:nvSpPr>
-          <p:cNvPr id="6" name="TextBox 5"/>
+          <p:cNvPr id="21" name="TextBox 20"/>
           <p:cNvSpPr txBox="1"/>
           <p:nvPr/>
         </p:nvSpPr>
@@ -6641,20 +7706,88 @@
       <p:grpSpPr/>
       <p:sp>
         <p:nvSpPr>
-          <p:cNvPr id="2" name="Rectangle 1"/>
+          <p:cNvPr id="2" name="TextBox 1"/>
+          <p:cNvSpPr txBox="1"/>
+          <p:nvPr/>
+        </p:nvSpPr>
+        <p:spPr>
+          <a:xfrm>
+            <a:off x="777240" y="566928"/>
+            <a:ext cx="10637215" cy="365760"/>
+          </a:xfrm>
+          <a:prstGeom prst="rect">
+            <a:avLst/>
+          </a:prstGeom>
+          <a:noFill/>
+        </p:spPr>
+        <p:txBody>
+          <a:bodyPr wrap="square" lIns="0" rIns="0" tIns="0" bIns="0">
+            <a:spAutoFit/>
+          </a:bodyPr>
+          <a:lstStyle/>
+          <a:p>
+            <a:r>
+              <a:rPr sz="1300" b="1" i="0">
+                <a:solidFill>
+                  <a:srgbClr val="B45309"/>
+                </a:solidFill>
+                <a:latin typeface="Calibri"/>
+              </a:rPr>
+              <a:t>IN-CLASS ACTIVITY  ·  10 MINUTES</a:t>
+            </a:r>
+          </a:p>
+        </p:txBody>
+      </p:sp>
+      <p:sp>
+        <p:nvSpPr>
+          <p:cNvPr id="3" name="TextBox 2"/>
+          <p:cNvSpPr txBox="1"/>
+          <p:nvPr/>
+        </p:nvSpPr>
+        <p:spPr>
+          <a:xfrm>
+            <a:off x="777240" y="960120"/>
+            <a:ext cx="10637215" cy="731520"/>
+          </a:xfrm>
+          <a:prstGeom prst="rect">
+            <a:avLst/>
+          </a:prstGeom>
+          <a:noFill/>
+        </p:spPr>
+        <p:txBody>
+          <a:bodyPr wrap="square" lIns="0" rIns="0" tIns="0" bIns="0">
+            <a:spAutoFit/>
+          </a:bodyPr>
+          <a:lstStyle/>
+          <a:p>
+            <a:r>
+              <a:rPr sz="3000" b="1" i="0">
+                <a:solidFill>
+                  <a:srgbClr val="1F2937"/>
+                </a:solidFill>
+                <a:latin typeface="Calibri Light"/>
+              </a:rPr>
+              <a:t>Self-Check: Can You Answer These?</a:t>
+            </a:r>
+          </a:p>
+        </p:txBody>
+      </p:sp>
+      <p:sp>
+        <p:nvSpPr>
+          <p:cNvPr id="4" name="Rectangle 3"/>
           <p:cNvSpPr/>
           <p:nvPr/>
         </p:nvSpPr>
         <p:spPr>
           <a:xfrm>
-            <a:off x="0" y="0"/>
-            <a:ext cx="292608" cy="6858000"/>
+            <a:off x="777240" y="1783080"/>
+            <a:ext cx="1051560" cy="38100"/>
           </a:xfrm>
           <a:prstGeom prst="rect">
             <a:avLst/>
           </a:prstGeom>
           <a:solidFill>
-            <a:srgbClr val="0F766E"/>
+            <a:srgbClr val="B45309"/>
           </a:solidFill>
           <a:ln>
             <a:noFill/>
@@ -6685,14 +7818,14 @@
       </p:sp>
       <p:sp>
         <p:nvSpPr>
-          <p:cNvPr id="3" name="TextBox 2"/>
+          <p:cNvPr id="5" name="TextBox 4"/>
           <p:cNvSpPr txBox="1"/>
           <p:nvPr/>
         </p:nvSpPr>
         <p:spPr>
           <a:xfrm>
-            <a:off x="1280160" y="2743200"/>
-            <a:ext cx="10058400" cy="457200"/>
+            <a:off x="777240" y="2148840"/>
+            <a:ext cx="10637215" cy="3931920"/>
           </a:xfrm>
           <a:prstGeom prst="rect">
             <a:avLst/>
@@ -6705,28 +7838,160 @@
           </a:bodyPr>
           <a:lstStyle/>
           <a:p>
-            <a:r>
-              <a:rPr sz="1400" b="1" i="0">
-                <a:solidFill>
-                  <a:srgbClr val="0F766E"/>
+            <a:pPr>
+              <a:lnSpc>
+                <a:spcPct val="115000"/>
+              </a:lnSpc>
+              <a:spcAft>
+                <a:spcPts val="1000"/>
+              </a:spcAft>
+            </a:pPr>
+            <a:r>
+              <a:rPr sz="1900" b="1" i="0">
+                <a:solidFill>
+                  <a:srgbClr val="1F2937"/>
                 </a:solidFill>
                 <a:latin typeface="Calibri"/>
               </a:rPr>
-              <a:t>PART 4</a:t>
-            </a:r>
-          </a:p>
-        </p:txBody>
-      </p:sp>
-      <p:sp>
-        <p:nvSpPr>
-          <p:cNvPr id="4" name="TextBox 3"/>
+              <a:t>•  No devices. Answer each in one or two sentences, to yourself or a neighbour.</a:t>
+            </a:r>
+          </a:p>
+          <a:p>
+            <a:pPr>
+              <a:lnSpc>
+                <a:spcPct val="115000"/>
+              </a:lnSpc>
+              <a:spcAft>
+                <a:spcPts val="1000"/>
+              </a:spcAft>
+            </a:pPr>
+          </a:p>
+          <a:p>
+            <a:pPr lvl="1">
+              <a:lnSpc>
+                <a:spcPct val="115000"/>
+              </a:lnSpc>
+              <a:spcAft>
+                <a:spcPts val="500"/>
+              </a:spcAft>
+            </a:pPr>
+            <a:r>
+              <a:rPr sz="1600" b="0" i="0">
+                <a:solidFill>
+                  <a:srgbClr val="333D4B"/>
+                </a:solidFill>
+                <a:latin typeface="Calibri"/>
+              </a:rPr>
+              <a:t>—  1.  Why can these systems not simply say "I don't know" whenever it would be appropriate?</a:t>
+            </a:r>
+          </a:p>
+          <a:p>
+            <a:pPr lvl="1">
+              <a:lnSpc>
+                <a:spcPct val="115000"/>
+              </a:lnSpc>
+              <a:spcAft>
+                <a:spcPts val="500"/>
+              </a:spcAft>
+            </a:pPr>
+            <a:r>
+              <a:rPr sz="1600" b="0" i="0">
+                <a:solidFill>
+                  <a:srgbClr val="333D4B"/>
+                </a:solidFill>
+                <a:latin typeface="Calibri"/>
+              </a:rPr>
+              <a:t>—  2.  Why does "be accurate" fail to make an answer accurate?</a:t>
+            </a:r>
+          </a:p>
+          <a:p>
+            <a:pPr lvl="1">
+              <a:lnSpc>
+                <a:spcPct val="115000"/>
+              </a:lnSpc>
+              <a:spcAft>
+                <a:spcPts val="500"/>
+              </a:spcAft>
+            </a:pPr>
+            <a:r>
+              <a:rPr sz="1600" b="0" i="0">
+                <a:solidFill>
+                  <a:srgbClr val="333D4B"/>
+                </a:solidFill>
+                <a:latin typeface="Calibri"/>
+              </a:rPr>
+              <a:t>—  3.  A grounded answer has no quotation. What do you suspect, and why?</a:t>
+            </a:r>
+          </a:p>
+          <a:p>
+            <a:pPr lvl="1">
+              <a:lnSpc>
+                <a:spcPct val="115000"/>
+              </a:lnSpc>
+              <a:spcAft>
+                <a:spcPts val="500"/>
+              </a:spcAft>
+            </a:pPr>
+            <a:r>
+              <a:rPr sz="1600" b="0" i="0">
+                <a:solidFill>
+                  <a:srgbClr val="333D4B"/>
+                </a:solidFill>
+                <a:latin typeface="Calibri"/>
+              </a:rPr>
+              <a:t>—  4.  Why is 95\% reliability per step not reassuring in a ten-step workflow?</a:t>
+            </a:r>
+          </a:p>
+          <a:p>
+            <a:pPr lvl="1">
+              <a:lnSpc>
+                <a:spcPct val="115000"/>
+              </a:lnSpc>
+              <a:spcAft>
+                <a:spcPts val="500"/>
+              </a:spcAft>
+            </a:pPr>
+            <a:r>
+              <a:rPr sz="1600" b="0" i="0">
+                <a:solidFill>
+                  <a:srgbClr val="333D4B"/>
+                </a:solidFill>
+                <a:latin typeface="Calibri"/>
+              </a:rPr>
+              <a:t>—  5.  Why is indirect injection worse for you than direct injection?</a:t>
+            </a:r>
+          </a:p>
+          <a:p>
+            <a:pPr lvl="1">
+              <a:lnSpc>
+                <a:spcPct val="115000"/>
+              </a:lnSpc>
+              <a:spcAft>
+                <a:spcPts val="500"/>
+              </a:spcAft>
+            </a:pPr>
+            <a:r>
+              <a:rPr sz="1600" b="0" i="0">
+                <a:solidFill>
+                  <a:srgbClr val="333D4B"/>
+                </a:solidFill>
+                <a:latin typeface="Calibri"/>
+              </a:rPr>
+              <a:t>—  6.  Why does professional formatting increase risk as well as usefulness?</a:t>
+            </a:r>
+          </a:p>
+        </p:txBody>
+      </p:sp>
+      <p:sp>
+        <p:nvSpPr>
+          <p:cNvPr id="6" name="TextBox 5"/>
           <p:cNvSpPr txBox="1"/>
           <p:nvPr/>
         </p:nvSpPr>
         <p:spPr>
           <a:xfrm>
-            <a:off x="1280160" y="3200400"/>
-            <a:ext cx="10058400" cy="1097280"/>
+            <a:off x="777240" y="6355080"/>
+            <a:ext cx="10637215" cy="274320"/>
           </a:xfrm>
           <a:prstGeom prst="rect">
             <a:avLst/>
@@ -6740,13 +8005,48 @@
           <a:lstStyle/>
           <a:p>
             <a:r>
-              <a:rPr sz="3400" b="1" i="0">
-                <a:solidFill>
-                  <a:srgbClr val="1F2937"/>
-                </a:solidFill>
-                <a:latin typeface="Calibri Light"/>
-              </a:rPr>
-              <a:t>The Final Exam</a:t>
+              <a:rPr sz="1000" b="0" i="0">
+                <a:solidFill>
+                  <a:srgbClr val="6B7787"/>
+                </a:solidFill>
+                <a:latin typeface="Calibri"/>
+              </a:rPr>
+              <a:t>Week 14  ·  Prompt Engineering and Large Language Models</a:t>
+            </a:r>
+          </a:p>
+        </p:txBody>
+      </p:sp>
+      <p:sp>
+        <p:nvSpPr>
+          <p:cNvPr id="7" name="TextBox 6"/>
+          <p:cNvSpPr txBox="1"/>
+          <p:nvPr/>
+        </p:nvSpPr>
+        <p:spPr>
+          <a:xfrm>
+            <a:off x="10500055" y="6355080"/>
+            <a:ext cx="914400" cy="274320"/>
+          </a:xfrm>
+          <a:prstGeom prst="rect">
+            <a:avLst/>
+          </a:prstGeom>
+          <a:noFill/>
+        </p:spPr>
+        <p:txBody>
+          <a:bodyPr wrap="square" lIns="0" rIns="0" tIns="0" bIns="0">
+            <a:spAutoFit/>
+          </a:bodyPr>
+          <a:lstStyle/>
+          <a:p>
+            <a:pPr algn="r"/>
+            <a:r>
+              <a:rPr sz="1000" b="0" i="0">
+                <a:solidFill>
+                  <a:srgbClr val="6B7787"/>
+                </a:solidFill>
+                <a:latin typeface="Calibri"/>
+              </a:rPr>
+              <a:t>13</a:t>
             </a:r>
           </a:p>
         </p:txBody>
@@ -6798,7 +8098,7 @@
                 </a:solidFill>
                 <a:latin typeface="Calibri Light"/>
               </a:rPr>
-              <a:t>What the Final Covers</a:t>
+              <a:t>The Answers</a:t>
             </a:r>
           </a:p>
         </p:txBody>
@@ -6868,54 +8168,6 @@
             <a:spAutoFit/>
           </a:bodyPr>
           <a:lstStyle/>
-          <a:p>
-            <a:pPr>
-              <a:lnSpc>
-                <a:spcPct val="115000"/>
-              </a:lnSpc>
-              <a:spcAft>
-                <a:spcPts val="1000"/>
-              </a:spcAft>
-            </a:pPr>
-            <a:r>
-              <a:rPr sz="1900" b="1" i="0">
-                <a:solidFill>
-                  <a:srgbClr val="1F2937"/>
-                </a:solidFill>
-                <a:latin typeface="Calibri"/>
-              </a:rPr>
-              <a:t>•  Format: 40 multiple-choice questions · 2.5 points each · 90 minutes · closed book</a:t>
-            </a:r>
-          </a:p>
-          <a:p>
-            <a:pPr>
-              <a:lnSpc>
-                <a:spcPct val="115000"/>
-              </a:lnSpc>
-              <a:spcAft>
-                <a:spcPts val="1000"/>
-              </a:spcAft>
-            </a:pPr>
-          </a:p>
-          <a:p>
-            <a:pPr>
-              <a:lnSpc>
-                <a:spcPct val="115000"/>
-              </a:lnSpc>
-              <a:spcAft>
-                <a:spcPts val="1000"/>
-              </a:spcAft>
-            </a:pPr>
-            <a:r>
-              <a:rPr sz="1900" b="1" i="0">
-                <a:solidFill>
-                  <a:srgbClr val="1F2937"/>
-                </a:solidFill>
-                <a:latin typeface="Calibri"/>
-              </a:rPr>
-              <a:t>•  Coverage: the whole course, weighted towards Weeks 6–13</a:t>
-            </a:r>
-          </a:p>
           <a:p>
             <a:pPr lvl="1">
               <a:lnSpc>
@@ -6932,7 +8184,7 @@
                 </a:solidFill>
                 <a:latin typeface="Calibri"/>
               </a:rPr>
-              <a:t>—  Roughly one third mechanism — tokens, prediction, context, why hallucination happens</a:t>
+              <a:t>—  1.  "I don't know" is a token sequence competing with all others, and questions in training text are followed by answers. Fine-tuning shifts the tendency; it installs no mechanism.</a:t>
             </a:r>
           </a:p>
           <a:p>
@@ -6951,7 +8203,7 @@
                 </a:solidFill>
                 <a:latin typeface="Calibri"/>
               </a:rPr>
-              <a:t>—  Roughly one third diagnosis — here is an answer and its source; what is wrong with it?</a:t>
+              <a:t>—  2.  Instructions change tone and shape, never available information. Requesting authority produces authority.</a:t>
             </a:r>
           </a:p>
           <a:p>
@@ -6970,36 +8222,64 @@
                 </a:solidFill>
                 <a:latin typeface="Calibri"/>
               </a:rPr>
-              <a:t>—  Roughly one third design and judgment — where does the human go, what should this system not do</a:t>
-            </a:r>
-          </a:p>
-          <a:p>
-            <a:pPr>
+              <a:t>—  3.  Answered from memory. Absence of a quotation is its signature.</a:t>
+            </a:r>
+          </a:p>
+          <a:p>
+            <a:pPr lvl="1">
               <a:lnSpc>
                 <a:spcPct val="115000"/>
               </a:lnSpc>
               <a:spcAft>
-                <a:spcPts val="1000"/>
+                <a:spcPts val="500"/>
               </a:spcAft>
             </a:pPr>
-          </a:p>
-          <a:p>
-            <a:pPr>
+            <a:r>
+              <a:rPr sz="1600" b="0" i="0">
+                <a:solidFill>
+                  <a:srgbClr val="333D4B"/>
+                </a:solidFill>
+                <a:latin typeface="Calibri"/>
+              </a:rPr>
+              <a:t>—  4.  0.95 to the tenth is about 0.60 — and errors are inherited by later steps rather than averaged away.</a:t>
+            </a:r>
+          </a:p>
+          <a:p>
+            <a:pPr lvl="1">
               <a:lnSpc>
                 <a:spcPct val="115000"/>
               </a:lnSpc>
               <a:spcAft>
-                <a:spcPts val="1000"/>
+                <a:spcPts val="500"/>
               </a:spcAft>
             </a:pPr>
             <a:r>
-              <a:rPr sz="1900" b="1" i="0">
-                <a:solidFill>
-                  <a:srgbClr val="1F2937"/>
+              <a:rPr sz="1600" b="0" i="0">
+                <a:solidFill>
+                  <a:srgbClr val="333D4B"/>
                 </a:solidFill>
                 <a:latin typeface="Calibri"/>
               </a:rPr>
-              <a:t>•  Every "concepts you must be able to define and diagnose" slide is examinable in full.</a:t>
+              <a:t>—  5.  The instruction is hidden in content you never see, so there is no point at which you could refuse. You are the victim rather than the attacker.</a:t>
+            </a:r>
+          </a:p>
+          <a:p>
+            <a:pPr lvl="1">
+              <a:lnSpc>
+                <a:spcPct val="115000"/>
+              </a:lnSpc>
+              <a:spcAft>
+                <a:spcPts val="500"/>
+              </a:spcAft>
+            </a:pPr>
+            <a:r>
+              <a:rPr sz="1600" b="0" i="0">
+                <a:solidFill>
+                  <a:srgbClr val="333D4B"/>
+                </a:solidFill>
+                <a:latin typeface="Calibri"/>
+              </a:rPr>
+              <a:t>—  6.  It makes wrong content look like competent professional work, so it is trusted more — while correctness is unchanged.</a:t>
             </a:r>
           </a:p>
         </p:txBody>
@@ -7120,7 +8400,7 @@
                 </a:solidFill>
                 <a:latin typeface="Calibri Light"/>
               </a:rPr>
-              <a:t>How to Revise</a:t>
+              <a:t>What to Carry Into Practice</a:t>
             </a:r>
           </a:p>
         </p:txBody>
@@ -7171,542 +8451,14 @@
       </p:sp>
       <p:sp>
         <p:nvSpPr>
-          <p:cNvPr id="4" name="Rounded Rectangle 3"/>
-          <p:cNvSpPr/>
-          <p:nvPr/>
-        </p:nvSpPr>
-        <p:spPr>
-          <a:xfrm>
-            <a:off x="777240" y="2057400"/>
-            <a:ext cx="3301898" cy="3200400"/>
-          </a:xfrm>
-          <a:prstGeom prst="roundRect">
-            <a:avLst>
-              <a:gd name="adj" fmla="val 10000"/>
-            </a:avLst>
-          </a:prstGeom>
-          <a:solidFill>
-            <a:srgbClr val="F1F5F9"/>
-          </a:solidFill>
-          <a:ln w="15875">
-            <a:solidFill>
-              <a:srgbClr val="D3DDE6"/>
-            </a:solidFill>
-          </a:ln>
-          <a:effectLst/>
-        </p:spPr>
-        <p:style>
-          <a:lnRef idx="1">
-            <a:schemeClr val="accent1"/>
-          </a:lnRef>
-          <a:fillRef idx="3">
-            <a:schemeClr val="accent1"/>
-          </a:fillRef>
-          <a:effectRef idx="2">
-            <a:schemeClr val="accent1"/>
-          </a:effectRef>
-          <a:fontRef idx="minor">
-            <a:schemeClr val="lt1"/>
-          </a:fontRef>
-        </p:style>
-        <p:txBody>
-          <a:bodyPr rtlCol="0" anchor="ctr"/>
-          <a:lstStyle/>
-          <a:p>
-            <a:pPr algn="ctr"/>
-          </a:p>
-        </p:txBody>
-      </p:sp>
-      <p:sp>
-        <p:nvSpPr>
-          <p:cNvPr id="5" name="Rectangle 4"/>
-          <p:cNvSpPr/>
-          <p:nvPr/>
-        </p:nvSpPr>
-        <p:spPr>
-          <a:xfrm>
-            <a:off x="978408" y="2331720"/>
-            <a:ext cx="640080" cy="38100"/>
-          </a:xfrm>
-          <a:prstGeom prst="rect">
-            <a:avLst/>
-          </a:prstGeom>
-          <a:solidFill>
-            <a:srgbClr val="0F766E"/>
-          </a:solidFill>
-          <a:ln>
-            <a:noFill/>
-          </a:ln>
-          <a:effectLst/>
-        </p:spPr>
-        <p:style>
-          <a:lnRef idx="1">
-            <a:schemeClr val="accent1"/>
-          </a:lnRef>
-          <a:fillRef idx="3">
-            <a:schemeClr val="accent1"/>
-          </a:fillRef>
-          <a:effectRef idx="2">
-            <a:schemeClr val="accent1"/>
-          </a:effectRef>
-          <a:fontRef idx="minor">
-            <a:schemeClr val="lt1"/>
-          </a:fontRef>
-        </p:style>
-        <p:txBody>
-          <a:bodyPr rtlCol="0" anchor="ctr"/>
-          <a:lstStyle/>
-          <a:p>
-            <a:pPr algn="ctr"/>
-          </a:p>
-        </p:txBody>
-      </p:sp>
-      <p:sp>
-        <p:nvSpPr>
-          <p:cNvPr id="6" name="TextBox 5"/>
+          <p:cNvPr id="4" name="TextBox 3"/>
           <p:cNvSpPr txBox="1"/>
           <p:nvPr/>
         </p:nvSpPr>
         <p:spPr>
           <a:xfrm>
-            <a:off x="978408" y="2560320"/>
-            <a:ext cx="2899562" cy="640080"/>
-          </a:xfrm>
-          <a:prstGeom prst="rect">
-            <a:avLst/>
-          </a:prstGeom>
-          <a:noFill/>
-        </p:spPr>
-        <p:txBody>
-          <a:bodyPr wrap="square" lIns="0" rIns="0" tIns="0" bIns="0" anchor="t">
-            <a:spAutoFit/>
-          </a:bodyPr>
-          <a:lstStyle/>
-          <a:p>
-            <a:pPr algn="l">
-              <a:lnSpc>
-                <a:spcPct val="105000"/>
-              </a:lnSpc>
-              <a:spcAft>
-                <a:spcPts val="200"/>
-              </a:spcAft>
-            </a:pPr>
-            <a:r>
-              <a:rPr sz="1800" b="1" i="0">
-                <a:solidFill>
-                  <a:srgbClr val="1F2937"/>
-                </a:solidFill>
-                <a:latin typeface="Calibri"/>
-              </a:rPr>
-              <a:t>Learn the taxonomy by name</a:t>
-            </a:r>
-          </a:p>
-        </p:txBody>
-      </p:sp>
-      <p:sp>
-        <p:nvSpPr>
-          <p:cNvPr id="7" name="TextBox 6"/>
-          <p:cNvSpPr txBox="1"/>
-          <p:nvPr/>
-        </p:nvSpPr>
-        <p:spPr>
-          <a:xfrm>
-            <a:off x="978408" y="3246120"/>
-            <a:ext cx="2899562" cy="1737360"/>
-          </a:xfrm>
-          <a:prstGeom prst="rect">
-            <a:avLst/>
-          </a:prstGeom>
-          <a:noFill/>
-        </p:spPr>
-        <p:txBody>
-          <a:bodyPr wrap="square" lIns="0" rIns="0" tIns="0" bIns="0" anchor="t">
-            <a:spAutoFit/>
-          </a:bodyPr>
-          <a:lstStyle/>
-          <a:p>
-            <a:pPr algn="l">
-              <a:lnSpc>
-                <a:spcPct val="105000"/>
-              </a:lnSpc>
-              <a:spcAft>
-                <a:spcPts val="200"/>
-              </a:spcAft>
-            </a:pPr>
-            <a:r>
-              <a:rPr sz="1350" b="0" i="0">
-                <a:solidFill>
-                  <a:srgbClr val="333D4B"/>
-                </a:solidFill>
-                <a:latin typeface="Calibri"/>
-              </a:rPr>
-              <a:t>Nine failure modes across three groups. Most diagnosis questions are asking you to name one. If you can name them, you can answer them.</a:t>
-            </a:r>
-          </a:p>
-        </p:txBody>
-      </p:sp>
-      <p:sp>
-        <p:nvSpPr>
-          <p:cNvPr id="8" name="Rounded Rectangle 7"/>
-          <p:cNvSpPr/>
-          <p:nvPr/>
-        </p:nvSpPr>
-        <p:spPr>
-          <a:xfrm>
-            <a:off x="4444898" y="2057400"/>
-            <a:ext cx="3301898" cy="3200400"/>
-          </a:xfrm>
-          <a:prstGeom prst="roundRect">
-            <a:avLst>
-              <a:gd name="adj" fmla="val 10000"/>
-            </a:avLst>
-          </a:prstGeom>
-          <a:solidFill>
-            <a:srgbClr val="F1F5F9"/>
-          </a:solidFill>
-          <a:ln w="15875">
-            <a:solidFill>
-              <a:srgbClr val="D3DDE6"/>
-            </a:solidFill>
-          </a:ln>
-          <a:effectLst/>
-        </p:spPr>
-        <p:style>
-          <a:lnRef idx="1">
-            <a:schemeClr val="accent1"/>
-          </a:lnRef>
-          <a:fillRef idx="3">
-            <a:schemeClr val="accent1"/>
-          </a:fillRef>
-          <a:effectRef idx="2">
-            <a:schemeClr val="accent1"/>
-          </a:effectRef>
-          <a:fontRef idx="minor">
-            <a:schemeClr val="lt1"/>
-          </a:fontRef>
-        </p:style>
-        <p:txBody>
-          <a:bodyPr rtlCol="0" anchor="ctr"/>
-          <a:lstStyle/>
-          <a:p>
-            <a:pPr algn="ctr"/>
-          </a:p>
-        </p:txBody>
-      </p:sp>
-      <p:sp>
-        <p:nvSpPr>
-          <p:cNvPr id="9" name="Rectangle 8"/>
-          <p:cNvSpPr/>
-          <p:nvPr/>
-        </p:nvSpPr>
-        <p:spPr>
-          <a:xfrm>
-            <a:off x="4646066" y="2331720"/>
-            <a:ext cx="640080" cy="38100"/>
-          </a:xfrm>
-          <a:prstGeom prst="rect">
-            <a:avLst/>
-          </a:prstGeom>
-          <a:solidFill>
-            <a:srgbClr val="0F766E"/>
-          </a:solidFill>
-          <a:ln>
-            <a:noFill/>
-          </a:ln>
-          <a:effectLst/>
-        </p:spPr>
-        <p:style>
-          <a:lnRef idx="1">
-            <a:schemeClr val="accent1"/>
-          </a:lnRef>
-          <a:fillRef idx="3">
-            <a:schemeClr val="accent1"/>
-          </a:fillRef>
-          <a:effectRef idx="2">
-            <a:schemeClr val="accent1"/>
-          </a:effectRef>
-          <a:fontRef idx="minor">
-            <a:schemeClr val="lt1"/>
-          </a:fontRef>
-        </p:style>
-        <p:txBody>
-          <a:bodyPr rtlCol="0" anchor="ctr"/>
-          <a:lstStyle/>
-          <a:p>
-            <a:pPr algn="ctr"/>
-          </a:p>
-        </p:txBody>
-      </p:sp>
-      <p:sp>
-        <p:nvSpPr>
-          <p:cNvPr id="10" name="TextBox 9"/>
-          <p:cNvSpPr txBox="1"/>
-          <p:nvPr/>
-        </p:nvSpPr>
-        <p:spPr>
-          <a:xfrm>
-            <a:off x="4646066" y="2560320"/>
-            <a:ext cx="2899562" cy="640080"/>
-          </a:xfrm>
-          <a:prstGeom prst="rect">
-            <a:avLst/>
-          </a:prstGeom>
-          <a:noFill/>
-        </p:spPr>
-        <p:txBody>
-          <a:bodyPr wrap="square" lIns="0" rIns="0" tIns="0" bIns="0" anchor="t">
-            <a:spAutoFit/>
-          </a:bodyPr>
-          <a:lstStyle/>
-          <a:p>
-            <a:pPr algn="l">
-              <a:lnSpc>
-                <a:spcPct val="105000"/>
-              </a:lnSpc>
-              <a:spcAft>
-                <a:spcPts val="200"/>
-              </a:spcAft>
-            </a:pPr>
-            <a:r>
-              <a:rPr sz="1800" b="1" i="0">
-                <a:solidFill>
-                  <a:srgbClr val="1F2937"/>
-                </a:solidFill>
-                <a:latin typeface="Calibri"/>
-              </a:rPr>
-              <a:t>Be able to explain mechanisms, not just state them</a:t>
-            </a:r>
-          </a:p>
-        </p:txBody>
-      </p:sp>
-      <p:sp>
-        <p:nvSpPr>
-          <p:cNvPr id="11" name="TextBox 10"/>
-          <p:cNvSpPr txBox="1"/>
-          <p:nvPr/>
-        </p:nvSpPr>
-        <p:spPr>
-          <a:xfrm>
-            <a:off x="4646066" y="3246120"/>
-            <a:ext cx="2899562" cy="1737360"/>
-          </a:xfrm>
-          <a:prstGeom prst="rect">
-            <a:avLst/>
-          </a:prstGeom>
-          <a:noFill/>
-        </p:spPr>
-        <p:txBody>
-          <a:bodyPr wrap="square" lIns="0" rIns="0" tIns="0" bIns="0" anchor="t">
-            <a:spAutoFit/>
-          </a:bodyPr>
-          <a:lstStyle/>
-          <a:p>
-            <a:pPr algn="l">
-              <a:lnSpc>
-                <a:spcPct val="105000"/>
-              </a:lnSpc>
-              <a:spcAft>
-                <a:spcPts val="200"/>
-              </a:spcAft>
-            </a:pPr>
-            <a:r>
-              <a:rPr sz="1350" b="0" i="0">
-                <a:solidFill>
-                  <a:srgbClr val="333D4B"/>
-                </a:solidFill>
-                <a:latin typeface="Calibri"/>
-              </a:rPr>
-              <a:t>Not "it hallucinates" but why — no truth check, plausibility optimised, thin coverage where plausible and true come apart.</a:t>
-            </a:r>
-          </a:p>
-        </p:txBody>
-      </p:sp>
-      <p:sp>
-        <p:nvSpPr>
-          <p:cNvPr id="12" name="Rounded Rectangle 11"/>
-          <p:cNvSpPr/>
-          <p:nvPr/>
-        </p:nvSpPr>
-        <p:spPr>
-          <a:xfrm>
-            <a:off x="8112556" y="2057400"/>
-            <a:ext cx="3301898" cy="3200400"/>
-          </a:xfrm>
-          <a:prstGeom prst="roundRect">
-            <a:avLst>
-              <a:gd name="adj" fmla="val 10000"/>
-            </a:avLst>
-          </a:prstGeom>
-          <a:solidFill>
-            <a:srgbClr val="F1F5F9"/>
-          </a:solidFill>
-          <a:ln w="15875">
-            <a:solidFill>
-              <a:srgbClr val="D3DDE6"/>
-            </a:solidFill>
-          </a:ln>
-          <a:effectLst/>
-        </p:spPr>
-        <p:style>
-          <a:lnRef idx="1">
-            <a:schemeClr val="accent1"/>
-          </a:lnRef>
-          <a:fillRef idx="3">
-            <a:schemeClr val="accent1"/>
-          </a:fillRef>
-          <a:effectRef idx="2">
-            <a:schemeClr val="accent1"/>
-          </a:effectRef>
-          <a:fontRef idx="minor">
-            <a:schemeClr val="lt1"/>
-          </a:fontRef>
-        </p:style>
-        <p:txBody>
-          <a:bodyPr rtlCol="0" anchor="ctr"/>
-          <a:lstStyle/>
-          <a:p>
-            <a:pPr algn="ctr"/>
-          </a:p>
-        </p:txBody>
-      </p:sp>
-      <p:sp>
-        <p:nvSpPr>
-          <p:cNvPr id="13" name="Rectangle 12"/>
-          <p:cNvSpPr/>
-          <p:nvPr/>
-        </p:nvSpPr>
-        <p:spPr>
-          <a:xfrm>
-            <a:off x="8313724" y="2331720"/>
-            <a:ext cx="640080" cy="38100"/>
-          </a:xfrm>
-          <a:prstGeom prst="rect">
-            <a:avLst/>
-          </a:prstGeom>
-          <a:solidFill>
-            <a:srgbClr val="0F766E"/>
-          </a:solidFill>
-          <a:ln>
-            <a:noFill/>
-          </a:ln>
-          <a:effectLst/>
-        </p:spPr>
-        <p:style>
-          <a:lnRef idx="1">
-            <a:schemeClr val="accent1"/>
-          </a:lnRef>
-          <a:fillRef idx="3">
-            <a:schemeClr val="accent1"/>
-          </a:fillRef>
-          <a:effectRef idx="2">
-            <a:schemeClr val="accent1"/>
-          </a:effectRef>
-          <a:fontRef idx="minor">
-            <a:schemeClr val="lt1"/>
-          </a:fontRef>
-        </p:style>
-        <p:txBody>
-          <a:bodyPr rtlCol="0" anchor="ctr"/>
-          <a:lstStyle/>
-          <a:p>
-            <a:pPr algn="ctr"/>
-          </a:p>
-        </p:txBody>
-      </p:sp>
-      <p:sp>
-        <p:nvSpPr>
-          <p:cNvPr id="14" name="TextBox 13"/>
-          <p:cNvSpPr txBox="1"/>
-          <p:nvPr/>
-        </p:nvSpPr>
-        <p:spPr>
-          <a:xfrm>
-            <a:off x="8313724" y="2560320"/>
-            <a:ext cx="2899562" cy="640080"/>
-          </a:xfrm>
-          <a:prstGeom prst="rect">
-            <a:avLst/>
-          </a:prstGeom>
-          <a:noFill/>
-        </p:spPr>
-        <p:txBody>
-          <a:bodyPr wrap="square" lIns="0" rIns="0" tIns="0" bIns="0" anchor="t">
-            <a:spAutoFit/>
-          </a:bodyPr>
-          <a:lstStyle/>
-          <a:p>
-            <a:pPr algn="l">
-              <a:lnSpc>
-                <a:spcPct val="105000"/>
-              </a:lnSpc>
-              <a:spcAft>
-                <a:spcPts val="200"/>
-              </a:spcAft>
-            </a:pPr>
-            <a:r>
-              <a:rPr sz="1800" b="1" i="0">
-                <a:solidFill>
-                  <a:srgbClr val="1F2937"/>
-                </a:solidFill>
-                <a:latin typeface="Calibri"/>
-              </a:rPr>
-              <a:t>Practise on your own artifacts</a:t>
-            </a:r>
-          </a:p>
-        </p:txBody>
-      </p:sp>
-      <p:sp>
-        <p:nvSpPr>
-          <p:cNvPr id="15" name="TextBox 14"/>
-          <p:cNvSpPr txBox="1"/>
-          <p:nvPr/>
-        </p:nvSpPr>
-        <p:spPr>
-          <a:xfrm>
-            <a:off x="8313724" y="3246120"/>
-            <a:ext cx="2899562" cy="1737360"/>
-          </a:xfrm>
-          <a:prstGeom prst="rect">
-            <a:avLst/>
-          </a:prstGeom>
-          <a:noFill/>
-        </p:spPr>
-        <p:txBody>
-          <a:bodyPr wrap="square" lIns="0" rIns="0" tIns="0" bIns="0" anchor="t">
-            <a:spAutoFit/>
-          </a:bodyPr>
-          <a:lstStyle/>
-          <a:p>
-            <a:pPr algn="l">
-              <a:lnSpc>
-                <a:spcPct val="105000"/>
-              </a:lnSpc>
-              <a:spcAft>
-                <a:spcPts val="200"/>
-              </a:spcAft>
-            </a:pPr>
-            <a:r>
-              <a:rPr sz="1350" b="0" i="0">
-                <a:solidFill>
-                  <a:srgbClr val="333D4B"/>
-                </a:solidFill>
-                <a:latin typeface="Calibri"/>
-              </a:rPr>
-              <a:t>Take your Field Build worksheet and ask: which of the nine could hit this? Where is the human? What did I constrain? That is the exam.</a:t>
-            </a:r>
-          </a:p>
-        </p:txBody>
-      </p:sp>
-      <p:sp>
-        <p:nvSpPr>
-          <p:cNvPr id="16" name="TextBox 15"/>
-          <p:cNvSpPr txBox="1"/>
-          <p:nvPr/>
-        </p:nvSpPr>
-        <p:spPr>
-          <a:xfrm>
-            <a:off x="777240" y="6355080"/>
-            <a:ext cx="10637215" cy="274320"/>
+            <a:off x="777240" y="1783080"/>
+            <a:ext cx="10637215" cy="4343400"/>
           </a:xfrm>
           <a:prstGeom prst="rect">
             <a:avLst/>
@@ -7719,6 +8471,181 @@
           </a:bodyPr>
           <a:lstStyle/>
           <a:p>
+            <a:pPr lvl="1">
+              <a:lnSpc>
+                <a:spcPct val="115000"/>
+              </a:lnSpc>
+              <a:spcAft>
+                <a:spcPts val="500"/>
+              </a:spcAft>
+            </a:pPr>
+            <a:r>
+              <a:rPr sz="1600" b="0" i="0">
+                <a:solidFill>
+                  <a:srgbClr val="333D4B"/>
+                </a:solidFill>
+                <a:latin typeface="Calibri"/>
+              </a:rPr>
+              <a:t>—  Ask what is being measured, and what you are certifying</a:t>
+            </a:r>
+          </a:p>
+          <a:p>
+            <a:pPr lvl="1">
+              <a:lnSpc>
+                <a:spcPct val="115000"/>
+              </a:lnSpc>
+              <a:spcAft>
+                <a:spcPts val="500"/>
+              </a:spcAft>
+            </a:pPr>
+            <a:r>
+              <a:rPr sz="1600" b="0" i="0">
+                <a:solidFill>
+                  <a:srgbClr val="333D4B"/>
+                </a:solidFill>
+                <a:latin typeface="Calibri"/>
+              </a:rPr>
+              <a:t>—  Supply sources rather than instructing accuracy</a:t>
+            </a:r>
+          </a:p>
+          <a:p>
+            <a:pPr lvl="1">
+              <a:lnSpc>
+                <a:spcPct val="115000"/>
+              </a:lnSpc>
+              <a:spcAft>
+                <a:spcPts val="500"/>
+              </a:spcAft>
+            </a:pPr>
+            <a:r>
+              <a:rPr sz="1600" b="0" i="0">
+                <a:solidFill>
+                  <a:srgbClr val="333D4B"/>
+                </a:solidFill>
+                <a:latin typeface="Calibri"/>
+              </a:rPr>
+              <a:t>—  Ask for the basis of an answer, then check it — the quote test costs seconds</a:t>
+            </a:r>
+          </a:p>
+          <a:p>
+            <a:pPr lvl="1">
+              <a:lnSpc>
+                <a:spcPct val="115000"/>
+              </a:lnSpc>
+              <a:spcAft>
+                <a:spcPts val="500"/>
+              </a:spcAft>
+            </a:pPr>
+            <a:r>
+              <a:rPr sz="1600" b="0" i="0">
+                <a:solidFill>
+                  <a:srgbClr val="333D4B"/>
+                </a:solidFill>
+                <a:latin typeface="Calibri"/>
+              </a:rPr>
+              <a:t>—  Write three questions it cannot answer, before you trust any system</a:t>
+            </a:r>
+          </a:p>
+          <a:p>
+            <a:pPr lvl="1">
+              <a:lnSpc>
+                <a:spcPct val="115000"/>
+              </a:lnSpc>
+              <a:spcAft>
+                <a:spcPts val="500"/>
+              </a:spcAft>
+            </a:pPr>
+            <a:r>
+              <a:rPr sz="1600" b="0" i="0">
+                <a:solidFill>
+                  <a:srgbClr val="333D4B"/>
+                </a:solidFill>
+                <a:latin typeface="Calibri"/>
+              </a:rPr>
+              <a:t>—  Put the human before the irreversible action</a:t>
+            </a:r>
+          </a:p>
+          <a:p>
+            <a:pPr lvl="1">
+              <a:lnSpc>
+                <a:spcPct val="115000"/>
+              </a:lnSpc>
+              <a:spcAft>
+                <a:spcPts val="500"/>
+              </a:spcAft>
+            </a:pPr>
+            <a:r>
+              <a:rPr sz="1600" b="0" i="0">
+                <a:solidFill>
+                  <a:srgbClr val="333D4B"/>
+                </a:solidFill>
+                <a:latin typeface="Calibri"/>
+              </a:rPr>
+              <a:t>—  Treat everything the system reads as instruction-carrying</a:t>
+            </a:r>
+          </a:p>
+          <a:p>
+            <a:pPr lvl="1">
+              <a:lnSpc>
+                <a:spcPct val="115000"/>
+              </a:lnSpc>
+              <a:spcAft>
+                <a:spcPts val="500"/>
+              </a:spcAft>
+            </a:pPr>
+            <a:r>
+              <a:rPr sz="1600" b="0" i="0">
+                <a:solidFill>
+                  <a:srgbClr val="333D4B"/>
+                </a:solidFill>
+                <a:latin typeface="Calibri"/>
+              </a:rPr>
+              <a:t>—  Name the person who would be harmed</a:t>
+            </a:r>
+          </a:p>
+          <a:p>
+            <a:pPr lvl="1">
+              <a:lnSpc>
+                <a:spcPct val="115000"/>
+              </a:lnSpc>
+              <a:spcAft>
+                <a:spcPts val="500"/>
+              </a:spcAft>
+            </a:pPr>
+            <a:r>
+              <a:rPr sz="1600" b="0" i="0">
+                <a:solidFill>
+                  <a:srgbClr val="333D4B"/>
+                </a:solidFill>
+                <a:latin typeface="Calibri"/>
+              </a:rPr>
+              <a:t>—  Keep one skill you practise unaided</a:t>
+            </a:r>
+          </a:p>
+        </p:txBody>
+      </p:sp>
+      <p:sp>
+        <p:nvSpPr>
+          <p:cNvPr id="5" name="TextBox 4"/>
+          <p:cNvSpPr txBox="1"/>
+          <p:nvPr/>
+        </p:nvSpPr>
+        <p:spPr>
+          <a:xfrm>
+            <a:off x="777240" y="6355080"/>
+            <a:ext cx="10637215" cy="274320"/>
+          </a:xfrm>
+          <a:prstGeom prst="rect">
+            <a:avLst/>
+          </a:prstGeom>
+          <a:noFill/>
+        </p:spPr>
+        <p:txBody>
+          <a:bodyPr wrap="square" lIns="0" rIns="0" tIns="0" bIns="0">
+            <a:spAutoFit/>
+          </a:bodyPr>
+          <a:lstStyle/>
+          <a:p>
             <a:r>
               <a:rPr sz="1000" b="0" i="0">
                 <a:solidFill>
@@ -7733,7 +8660,7 @@
       </p:sp>
       <p:sp>
         <p:nvSpPr>
-          <p:cNvPr id="17" name="TextBox 16"/>
+          <p:cNvPr id="6" name="TextBox 5"/>
           <p:cNvSpPr txBox="1"/>
           <p:nvPr/>
         </p:nvSpPr>
@@ -7786,48 +8713,14 @@
       <p:grpSpPr/>
       <p:sp>
         <p:nvSpPr>
-          <p:cNvPr id="2" name="TextBox 1"/>
-          <p:cNvSpPr txBox="1"/>
-          <p:nvPr/>
-        </p:nvSpPr>
-        <p:spPr>
-          <a:xfrm>
-            <a:off x="777240" y="566928"/>
-            <a:ext cx="10637215" cy="822960"/>
-          </a:xfrm>
-          <a:prstGeom prst="rect">
-            <a:avLst/>
-          </a:prstGeom>
-          <a:noFill/>
-        </p:spPr>
-        <p:txBody>
-          <a:bodyPr wrap="square" lIns="0" rIns="0" tIns="0" bIns="0">
-            <a:spAutoFit/>
-          </a:bodyPr>
-          <a:lstStyle/>
-          <a:p>
-            <a:r>
-              <a:rPr sz="3000" b="1" i="0">
-                <a:solidFill>
-                  <a:srgbClr val="1F2937"/>
-                </a:solidFill>
-                <a:latin typeface="Calibri Light"/>
-              </a:rPr>
-              <a:t>Closing</a:t>
-            </a:r>
-          </a:p>
-        </p:txBody>
-      </p:sp>
-      <p:sp>
-        <p:nvSpPr>
-          <p:cNvPr id="3" name="Rectangle 2"/>
+          <p:cNvPr id="2" name="Rectangle 1"/>
           <p:cNvSpPr/>
           <p:nvPr/>
         </p:nvSpPr>
         <p:spPr>
           <a:xfrm>
-            <a:off x="777240" y="1417320"/>
-            <a:ext cx="1051560" cy="38100"/>
+            <a:off x="0" y="0"/>
+            <a:ext cx="292608" cy="6858000"/>
           </a:xfrm>
           <a:prstGeom prst="rect">
             <a:avLst/>
@@ -7864,14 +8757,14 @@
       </p:sp>
       <p:sp>
         <p:nvSpPr>
-          <p:cNvPr id="4" name="TextBox 3"/>
+          <p:cNvPr id="3" name="TextBox 2"/>
           <p:cNvSpPr txBox="1"/>
           <p:nvPr/>
         </p:nvSpPr>
         <p:spPr>
           <a:xfrm>
-            <a:off x="777240" y="1783080"/>
-            <a:ext cx="10637215" cy="4343400"/>
+            <a:off x="1280160" y="2743200"/>
+            <a:ext cx="10058400" cy="457200"/>
           </a:xfrm>
           <a:prstGeom prst="rect">
             <a:avLst/>
@@ -7884,122 +8777,28 @@
           </a:bodyPr>
           <a:lstStyle/>
           <a:p>
-            <a:pPr>
-              <a:lnSpc>
-                <a:spcPct val="115000"/>
-              </a:lnSpc>
-              <a:spcAft>
-                <a:spcPts val="1000"/>
-              </a:spcAft>
-            </a:pPr>
-            <a:r>
-              <a:rPr sz="1900" b="0" i="0">
-                <a:solidFill>
-                  <a:srgbClr val="1F2937"/>
+            <a:r>
+              <a:rPr sz="1400" b="1" i="0">
+                <a:solidFill>
+                  <a:srgbClr val="0F766E"/>
                 </a:solidFill>
                 <a:latin typeface="Calibri"/>
               </a:rPr>
-              <a:t>•  You can explain how these systems work, in plain language, to anyone</a:t>
-            </a:r>
-          </a:p>
-          <a:p>
-            <a:pPr>
-              <a:lnSpc>
-                <a:spcPct val="115000"/>
-              </a:lnSpc>
-              <a:spcAft>
-                <a:spcPts val="1000"/>
-              </a:spcAft>
-            </a:pPr>
-            <a:r>
-              <a:rPr sz="1900" b="0" i="0">
-                <a:solidFill>
-                  <a:srgbClr val="1F2937"/>
-                </a:solidFill>
-                <a:latin typeface="Calibri"/>
-              </a:rPr>
-              <a:t>•  You have built four things and broken three of them</a:t>
-            </a:r>
-          </a:p>
-          <a:p>
-            <a:pPr>
-              <a:lnSpc>
-                <a:spcPct val="115000"/>
-              </a:lnSpc>
-              <a:spcAft>
-                <a:spcPts val="1000"/>
-              </a:spcAft>
-            </a:pPr>
-            <a:r>
-              <a:rPr sz="1900" b="1" i="0">
-                <a:solidFill>
-                  <a:srgbClr val="1F2937"/>
-                </a:solidFill>
-                <a:latin typeface="Calibri"/>
-              </a:rPr>
-              <a:t>•  You know that every failure that matters is invisible in the output</a:t>
-            </a:r>
-          </a:p>
-          <a:p>
-            <a:pPr>
-              <a:lnSpc>
-                <a:spcPct val="115000"/>
-              </a:lnSpc>
-              <a:spcAft>
-                <a:spcPts val="1000"/>
-              </a:spcAft>
-            </a:pPr>
-            <a:r>
-              <a:rPr sz="1900" b="0" i="0">
-                <a:solidFill>
-                  <a:srgbClr val="1F2937"/>
-                </a:solidFill>
-                <a:latin typeface="Calibri"/>
-              </a:rPr>
-              <a:t>•  And you know what to do about it: supply sources, ask for the basis, test what it cannot know, keep the human before the irreversible step</a:t>
-            </a:r>
-          </a:p>
-          <a:p>
-            <a:pPr>
-              <a:lnSpc>
-                <a:spcPct val="115000"/>
-              </a:lnSpc>
-              <a:spcAft>
-                <a:spcPts val="1000"/>
-              </a:spcAft>
-            </a:pPr>
-          </a:p>
-          <a:p>
-            <a:pPr lvl="1">
-              <a:lnSpc>
-                <a:spcPct val="115000"/>
-              </a:lnSpc>
-              <a:spcAft>
-                <a:spcPts val="500"/>
-              </a:spcAft>
-            </a:pPr>
-            <a:r>
-              <a:rPr sz="1600" b="0" i="0">
-                <a:solidFill>
-                  <a:srgbClr val="333D4B"/>
-                </a:solidFill>
-                <a:latin typeface="Calibri"/>
-              </a:rPr>
-              <a:t>—  The tools will change. All of that survives them.</a:t>
-            </a:r>
-          </a:p>
-        </p:txBody>
-      </p:sp>
-      <p:sp>
-        <p:nvSpPr>
-          <p:cNvPr id="5" name="TextBox 4"/>
+              <a:t>PART 4</a:t>
+            </a:r>
+          </a:p>
+        </p:txBody>
+      </p:sp>
+      <p:sp>
+        <p:nvSpPr>
+          <p:cNvPr id="4" name="TextBox 3"/>
           <p:cNvSpPr txBox="1"/>
           <p:nvPr/>
         </p:nvSpPr>
         <p:spPr>
           <a:xfrm>
-            <a:off x="777240" y="6355080"/>
-            <a:ext cx="10637215" cy="274320"/>
+            <a:off x="1280160" y="3200400"/>
+            <a:ext cx="10058400" cy="1097280"/>
           </a:xfrm>
           <a:prstGeom prst="rect">
             <a:avLst/>
@@ -8013,48 +8812,13 @@
           <a:lstStyle/>
           <a:p>
             <a:r>
-              <a:rPr sz="1000" b="0" i="0">
-                <a:solidFill>
-                  <a:srgbClr val="6B7787"/>
-                </a:solidFill>
-                <a:latin typeface="Calibri"/>
-              </a:rPr>
-              <a:t>Week 14  ·  Prompt Engineering and Large Language Models</a:t>
-            </a:r>
-          </a:p>
-        </p:txBody>
-      </p:sp>
-      <p:sp>
-        <p:nvSpPr>
-          <p:cNvPr id="6" name="TextBox 5"/>
-          <p:cNvSpPr txBox="1"/>
-          <p:nvPr/>
-        </p:nvSpPr>
-        <p:spPr>
-          <a:xfrm>
-            <a:off x="10500055" y="6355080"/>
-            <a:ext cx="914400" cy="274320"/>
-          </a:xfrm>
-          <a:prstGeom prst="rect">
-            <a:avLst/>
-          </a:prstGeom>
-          <a:noFill/>
-        </p:spPr>
-        <p:txBody>
-          <a:bodyPr wrap="square" lIns="0" rIns="0" tIns="0" bIns="0">
-            <a:spAutoFit/>
-          </a:bodyPr>
-          <a:lstStyle/>
-          <a:p>
-            <a:pPr algn="r"/>
-            <a:r>
-              <a:rPr sz="1000" b="0" i="0">
-                <a:solidFill>
-                  <a:srgbClr val="6B7787"/>
-                </a:solidFill>
-                <a:latin typeface="Calibri"/>
-              </a:rPr>
-              <a:t>16</a:t>
+              <a:rPr sz="3400" b="1" i="0">
+                <a:solidFill>
+                  <a:srgbClr val="1F2937"/>
+                </a:solidFill>
+                <a:latin typeface="Calibri Light"/>
+              </a:rPr>
+              <a:t>The Final Exam</a:t>
             </a:r>
           </a:p>
         </p:txBody>
@@ -8079,58 +8843,14 @@
       <p:grpSpPr/>
       <p:sp>
         <p:nvSpPr>
-          <p:cNvPr id="2" name="Rectangle 1"/>
-          <p:cNvSpPr/>
-          <p:nvPr/>
-        </p:nvSpPr>
-        <p:spPr>
-          <a:xfrm>
-            <a:off x="0" y="0"/>
-            <a:ext cx="12191695" cy="6858000"/>
-          </a:xfrm>
-          <a:prstGeom prst="rect">
-            <a:avLst/>
-          </a:prstGeom>
-          <a:solidFill>
-            <a:srgbClr val="1F2937"/>
-          </a:solidFill>
-          <a:ln>
-            <a:noFill/>
-          </a:ln>
-          <a:effectLst/>
-        </p:spPr>
-        <p:style>
-          <a:lnRef idx="1">
-            <a:schemeClr val="accent1"/>
-          </a:lnRef>
-          <a:fillRef idx="3">
-            <a:schemeClr val="accent1"/>
-          </a:fillRef>
-          <a:effectRef idx="2">
-            <a:schemeClr val="accent1"/>
-          </a:effectRef>
-          <a:fontRef idx="minor">
-            <a:schemeClr val="lt1"/>
-          </a:fontRef>
-        </p:style>
-        <p:txBody>
-          <a:bodyPr rtlCol="0" anchor="ctr"/>
-          <a:lstStyle/>
-          <a:p>
-            <a:pPr algn="ctr"/>
-          </a:p>
-        </p:txBody>
-      </p:sp>
-      <p:sp>
-        <p:nvSpPr>
-          <p:cNvPr id="3" name="TextBox 2"/>
+          <p:cNvPr id="2" name="TextBox 1"/>
           <p:cNvSpPr txBox="1"/>
           <p:nvPr/>
         </p:nvSpPr>
         <p:spPr>
           <a:xfrm>
-            <a:off x="777240" y="2468880"/>
-            <a:ext cx="10241280" cy="914400"/>
+            <a:off x="777240" y="566928"/>
+            <a:ext cx="10637215" cy="822960"/>
           </a:xfrm>
           <a:prstGeom prst="rect">
             <a:avLst/>
@@ -8144,27 +8864,27 @@
           <a:lstStyle/>
           <a:p>
             <a:r>
-              <a:rPr sz="4400" b="1" i="0">
-                <a:solidFill>
-                  <a:srgbClr val="FFFFFF"/>
+              <a:rPr sz="3000" b="1" i="0">
+                <a:solidFill>
+                  <a:srgbClr val="1F2937"/>
                 </a:solidFill>
                 <a:latin typeface="Calibri Light"/>
               </a:rPr>
-              <a:t>Questions?</a:t>
-            </a:r>
-          </a:p>
-        </p:txBody>
-      </p:sp>
-      <p:sp>
-        <p:nvSpPr>
-          <p:cNvPr id="4" name="Rectangle 3"/>
+              <a:t>What the Final Covers</a:t>
+            </a:r>
+          </a:p>
+        </p:txBody>
+      </p:sp>
+      <p:sp>
+        <p:nvSpPr>
+          <p:cNvPr id="3" name="Rectangle 2"/>
           <p:cNvSpPr/>
           <p:nvPr/>
         </p:nvSpPr>
         <p:spPr>
           <a:xfrm>
-            <a:off x="777240" y="3566160"/>
-            <a:ext cx="1051560" cy="50800"/>
+            <a:off x="777240" y="1417320"/>
+            <a:ext cx="1051560" cy="38100"/>
           </a:xfrm>
           <a:prstGeom prst="rect">
             <a:avLst/>
@@ -8201,14 +8921,14 @@
       </p:sp>
       <p:sp>
         <p:nvSpPr>
-          <p:cNvPr id="5" name="TextBox 4"/>
+          <p:cNvPr id="4" name="TextBox 3"/>
           <p:cNvSpPr txBox="1"/>
           <p:nvPr/>
         </p:nvSpPr>
         <p:spPr>
           <a:xfrm>
-            <a:off x="777240" y="3931920"/>
-            <a:ext cx="10241280" cy="914400"/>
+            <a:off x="777240" y="1783080"/>
+            <a:ext cx="10637215" cy="4343400"/>
           </a:xfrm>
           <a:prstGeom prst="rect">
             <a:avLst/>
@@ -8222,34 +8942,1191 @@
           <a:lstStyle/>
           <a:p>
             <a:pPr>
+              <a:lnSpc>
+                <a:spcPct val="115000"/>
+              </a:lnSpc>
+              <a:spcAft>
+                <a:spcPts val="1000"/>
+              </a:spcAft>
+            </a:pPr>
+            <a:r>
+              <a:rPr sz="1900" b="1" i="0">
+                <a:solidFill>
+                  <a:srgbClr val="1F2937"/>
+                </a:solidFill>
+                <a:latin typeface="Calibri"/>
+              </a:rPr>
+              <a:t>•  Format: 40 multiple-choice questions · 2.5 points each · 90 minutes · closed book</a:t>
+            </a:r>
+          </a:p>
+          <a:p>
+            <a:pPr>
+              <a:lnSpc>
+                <a:spcPct val="115000"/>
+              </a:lnSpc>
+              <a:spcAft>
+                <a:spcPts val="1000"/>
+              </a:spcAft>
+            </a:pPr>
+          </a:p>
+          <a:p>
+            <a:pPr>
+              <a:lnSpc>
+                <a:spcPct val="115000"/>
+              </a:lnSpc>
+              <a:spcAft>
+                <a:spcPts val="1000"/>
+              </a:spcAft>
+            </a:pPr>
+            <a:r>
+              <a:rPr sz="1900" b="1" i="0">
+                <a:solidFill>
+                  <a:srgbClr val="1F2937"/>
+                </a:solidFill>
+                <a:latin typeface="Calibri"/>
+              </a:rPr>
+              <a:t>•  Coverage: the whole course, weighted towards Weeks 6–13</a:t>
+            </a:r>
+          </a:p>
+          <a:p>
+            <a:pPr lvl="1">
+              <a:lnSpc>
+                <a:spcPct val="115000"/>
+              </a:lnSpc>
               <a:spcAft>
                 <a:spcPts val="500"/>
               </a:spcAft>
             </a:pPr>
             <a:r>
-              <a:rPr sz="1700" b="0" i="0">
-                <a:solidFill>
-                  <a:srgbClr val="FFFFFF"/>
+              <a:rPr sz="1600" b="0" i="0">
+                <a:solidFill>
+                  <a:srgbClr val="333D4B"/>
                 </a:solidFill>
                 <a:latin typeface="Calibri"/>
               </a:rPr>
-              <a:t>Mehmet Ali Akyol, PhD</a:t>
-            </a:r>
-          </a:p>
-          <a:p>
-            <a:pPr>
+              <a:t>—  Roughly one third mechanism — tokens, prediction, context, why hallucination happens</a:t>
+            </a:r>
+          </a:p>
+          <a:p>
+            <a:pPr lvl="1">
+              <a:lnSpc>
+                <a:spcPct val="115000"/>
+              </a:lnSpc>
               <a:spcAft>
                 <a:spcPts val="500"/>
               </a:spcAft>
             </a:pPr>
             <a:r>
-              <a:rPr sz="1700" b="0" i="0">
-                <a:solidFill>
-                  <a:srgbClr val="C3D0DB"/>
+              <a:rPr sz="1600" b="0" i="0">
+                <a:solidFill>
+                  <a:srgbClr val="333D4B"/>
                 </a:solidFill>
                 <a:latin typeface="Calibri"/>
               </a:rPr>
-              <a:t>mehmetali.akyol@gmail.com</a:t>
+              <a:t>—  Roughly one third diagnosis — here is an answer and its source; what is wrong with it?</a:t>
+            </a:r>
+          </a:p>
+          <a:p>
+            <a:pPr lvl="1">
+              <a:lnSpc>
+                <a:spcPct val="115000"/>
+              </a:lnSpc>
+              <a:spcAft>
+                <a:spcPts val="500"/>
+              </a:spcAft>
+            </a:pPr>
+            <a:r>
+              <a:rPr sz="1600" b="0" i="0">
+                <a:solidFill>
+                  <a:srgbClr val="333D4B"/>
+                </a:solidFill>
+                <a:latin typeface="Calibri"/>
+              </a:rPr>
+              <a:t>—  Roughly one third design and judgment — where does the human go, what should this system not do</a:t>
+            </a:r>
+          </a:p>
+          <a:p>
+            <a:pPr>
+              <a:lnSpc>
+                <a:spcPct val="115000"/>
+              </a:lnSpc>
+              <a:spcAft>
+                <a:spcPts val="1000"/>
+              </a:spcAft>
+            </a:pPr>
+          </a:p>
+          <a:p>
+            <a:pPr>
+              <a:lnSpc>
+                <a:spcPct val="115000"/>
+              </a:lnSpc>
+              <a:spcAft>
+                <a:spcPts val="1000"/>
+              </a:spcAft>
+            </a:pPr>
+            <a:r>
+              <a:rPr sz="1900" b="1" i="0">
+                <a:solidFill>
+                  <a:srgbClr val="1F2937"/>
+                </a:solidFill>
+                <a:latin typeface="Calibri"/>
+              </a:rPr>
+              <a:t>•  Every "concepts you must be able to define and diagnose" slide is examinable in full.</a:t>
+            </a:r>
+          </a:p>
+        </p:txBody>
+      </p:sp>
+      <p:sp>
+        <p:nvSpPr>
+          <p:cNvPr id="5" name="TextBox 4"/>
+          <p:cNvSpPr txBox="1"/>
+          <p:nvPr/>
+        </p:nvSpPr>
+        <p:spPr>
+          <a:xfrm>
+            <a:off x="777240" y="6355080"/>
+            <a:ext cx="10637215" cy="274320"/>
+          </a:xfrm>
+          <a:prstGeom prst="rect">
+            <a:avLst/>
+          </a:prstGeom>
+          <a:noFill/>
+        </p:spPr>
+        <p:txBody>
+          <a:bodyPr wrap="square" lIns="0" rIns="0" tIns="0" bIns="0">
+            <a:spAutoFit/>
+          </a:bodyPr>
+          <a:lstStyle/>
+          <a:p>
+            <a:r>
+              <a:rPr sz="1000" b="0" i="0">
+                <a:solidFill>
+                  <a:srgbClr val="6B7787"/>
+                </a:solidFill>
+                <a:latin typeface="Calibri"/>
+              </a:rPr>
+              <a:t>Week 14  ·  Prompt Engineering and Large Language Models</a:t>
+            </a:r>
+          </a:p>
+        </p:txBody>
+      </p:sp>
+      <p:sp>
+        <p:nvSpPr>
+          <p:cNvPr id="6" name="TextBox 5"/>
+          <p:cNvSpPr txBox="1"/>
+          <p:nvPr/>
+        </p:nvSpPr>
+        <p:spPr>
+          <a:xfrm>
+            <a:off x="10500055" y="6355080"/>
+            <a:ext cx="914400" cy="274320"/>
+          </a:xfrm>
+          <a:prstGeom prst="rect">
+            <a:avLst/>
+          </a:prstGeom>
+          <a:noFill/>
+        </p:spPr>
+        <p:txBody>
+          <a:bodyPr wrap="square" lIns="0" rIns="0" tIns="0" bIns="0">
+            <a:spAutoFit/>
+          </a:bodyPr>
+          <a:lstStyle/>
+          <a:p>
+            <a:pPr algn="r"/>
+            <a:r>
+              <a:rPr sz="1000" b="0" i="0">
+                <a:solidFill>
+                  <a:srgbClr val="6B7787"/>
+                </a:solidFill>
+                <a:latin typeface="Calibri"/>
+              </a:rPr>
+              <a:t>17</a:t>
+            </a:r>
+          </a:p>
+        </p:txBody>
+      </p:sp>
+    </p:spTree>
+  </p:cSld>
+  <p:clrMapOvr>
+    <a:masterClrMapping/>
+  </p:clrMapOvr>
+</p:sld>
+</file>
+
+<file path=ppt/slides/slide18.xml><?xml version="1.0" encoding="utf-8"?>
+<p:sld xmlns:a="http://schemas.openxmlformats.org/drawingml/2006/main" xmlns:p="http://schemas.openxmlformats.org/presentationml/2006/main" xmlns:r="http://schemas.openxmlformats.org/officeDocument/2006/relationships">
+  <p:cSld>
+    <p:spTree>
+      <p:nvGrpSpPr>
+        <p:cNvPr id="1" name=""/>
+        <p:cNvGrpSpPr/>
+        <p:nvPr/>
+      </p:nvGrpSpPr>
+      <p:grpSpPr/>
+      <p:sp>
+        <p:nvSpPr>
+          <p:cNvPr id="2" name="TextBox 1"/>
+          <p:cNvSpPr txBox="1"/>
+          <p:nvPr/>
+        </p:nvSpPr>
+        <p:spPr>
+          <a:xfrm>
+            <a:off x="777240" y="566928"/>
+            <a:ext cx="10637215" cy="822960"/>
+          </a:xfrm>
+          <a:prstGeom prst="rect">
+            <a:avLst/>
+          </a:prstGeom>
+          <a:noFill/>
+        </p:spPr>
+        <p:txBody>
+          <a:bodyPr wrap="square" lIns="0" rIns="0" tIns="0" bIns="0">
+            <a:spAutoFit/>
+          </a:bodyPr>
+          <a:lstStyle/>
+          <a:p>
+            <a:r>
+              <a:rPr sz="3000" b="1" i="0">
+                <a:solidFill>
+                  <a:srgbClr val="1F2937"/>
+                </a:solidFill>
+                <a:latin typeface="Calibri Light"/>
+              </a:rPr>
+              <a:t>How to Revise</a:t>
+            </a:r>
+          </a:p>
+        </p:txBody>
+      </p:sp>
+      <p:sp>
+        <p:nvSpPr>
+          <p:cNvPr id="3" name="Rectangle 2"/>
+          <p:cNvSpPr/>
+          <p:nvPr/>
+        </p:nvSpPr>
+        <p:spPr>
+          <a:xfrm>
+            <a:off x="777240" y="1417320"/>
+            <a:ext cx="1051560" cy="38100"/>
+          </a:xfrm>
+          <a:prstGeom prst="rect">
+            <a:avLst/>
+          </a:prstGeom>
+          <a:solidFill>
+            <a:srgbClr val="0F766E"/>
+          </a:solidFill>
+          <a:ln>
+            <a:noFill/>
+          </a:ln>
+          <a:effectLst/>
+        </p:spPr>
+        <p:style>
+          <a:lnRef idx="1">
+            <a:schemeClr val="accent1"/>
+          </a:lnRef>
+          <a:fillRef idx="3">
+            <a:schemeClr val="accent1"/>
+          </a:fillRef>
+          <a:effectRef idx="2">
+            <a:schemeClr val="accent1"/>
+          </a:effectRef>
+          <a:fontRef idx="minor">
+            <a:schemeClr val="lt1"/>
+          </a:fontRef>
+        </p:style>
+        <p:txBody>
+          <a:bodyPr rtlCol="0" anchor="ctr"/>
+          <a:lstStyle/>
+          <a:p>
+            <a:pPr algn="ctr"/>
+          </a:p>
+        </p:txBody>
+      </p:sp>
+      <p:sp>
+        <p:nvSpPr>
+          <p:cNvPr id="4" name="Rounded Rectangle 3"/>
+          <p:cNvSpPr/>
+          <p:nvPr/>
+        </p:nvSpPr>
+        <p:spPr>
+          <a:xfrm>
+            <a:off x="777240" y="2057400"/>
+            <a:ext cx="3301898" cy="3200400"/>
+          </a:xfrm>
+          <a:prstGeom prst="roundRect">
+            <a:avLst>
+              <a:gd name="adj" fmla="val 10000"/>
+            </a:avLst>
+          </a:prstGeom>
+          <a:solidFill>
+            <a:srgbClr val="F1F5F9"/>
+          </a:solidFill>
+          <a:ln w="15875">
+            <a:solidFill>
+              <a:srgbClr val="D3DDE6"/>
+            </a:solidFill>
+          </a:ln>
+          <a:effectLst/>
+        </p:spPr>
+        <p:style>
+          <a:lnRef idx="1">
+            <a:schemeClr val="accent1"/>
+          </a:lnRef>
+          <a:fillRef idx="3">
+            <a:schemeClr val="accent1"/>
+          </a:fillRef>
+          <a:effectRef idx="2">
+            <a:schemeClr val="accent1"/>
+          </a:effectRef>
+          <a:fontRef idx="minor">
+            <a:schemeClr val="lt1"/>
+          </a:fontRef>
+        </p:style>
+        <p:txBody>
+          <a:bodyPr rtlCol="0" anchor="ctr"/>
+          <a:lstStyle/>
+          <a:p>
+            <a:pPr algn="ctr"/>
+          </a:p>
+        </p:txBody>
+      </p:sp>
+      <p:sp>
+        <p:nvSpPr>
+          <p:cNvPr id="5" name="Rectangle 4"/>
+          <p:cNvSpPr/>
+          <p:nvPr/>
+        </p:nvSpPr>
+        <p:spPr>
+          <a:xfrm>
+            <a:off x="978408" y="2331720"/>
+            <a:ext cx="640080" cy="38100"/>
+          </a:xfrm>
+          <a:prstGeom prst="rect">
+            <a:avLst/>
+          </a:prstGeom>
+          <a:solidFill>
+            <a:srgbClr val="0F766E"/>
+          </a:solidFill>
+          <a:ln>
+            <a:noFill/>
+          </a:ln>
+          <a:effectLst/>
+        </p:spPr>
+        <p:style>
+          <a:lnRef idx="1">
+            <a:schemeClr val="accent1"/>
+          </a:lnRef>
+          <a:fillRef idx="3">
+            <a:schemeClr val="accent1"/>
+          </a:fillRef>
+          <a:effectRef idx="2">
+            <a:schemeClr val="accent1"/>
+          </a:effectRef>
+          <a:fontRef idx="minor">
+            <a:schemeClr val="lt1"/>
+          </a:fontRef>
+        </p:style>
+        <p:txBody>
+          <a:bodyPr rtlCol="0" anchor="ctr"/>
+          <a:lstStyle/>
+          <a:p>
+            <a:pPr algn="ctr"/>
+          </a:p>
+        </p:txBody>
+      </p:sp>
+      <p:sp>
+        <p:nvSpPr>
+          <p:cNvPr id="6" name="TextBox 5"/>
+          <p:cNvSpPr txBox="1"/>
+          <p:nvPr/>
+        </p:nvSpPr>
+        <p:spPr>
+          <a:xfrm>
+            <a:off x="978408" y="2560320"/>
+            <a:ext cx="2899562" cy="640080"/>
+          </a:xfrm>
+          <a:prstGeom prst="rect">
+            <a:avLst/>
+          </a:prstGeom>
+          <a:noFill/>
+        </p:spPr>
+        <p:txBody>
+          <a:bodyPr wrap="square" lIns="0" rIns="0" tIns="0" bIns="0" anchor="t">
+            <a:spAutoFit/>
+          </a:bodyPr>
+          <a:lstStyle/>
+          <a:p>
+            <a:pPr algn="l">
+              <a:lnSpc>
+                <a:spcPct val="105000"/>
+              </a:lnSpc>
+              <a:spcAft>
+                <a:spcPts val="200"/>
+              </a:spcAft>
+            </a:pPr>
+            <a:r>
+              <a:rPr sz="1800" b="1" i="0">
+                <a:solidFill>
+                  <a:srgbClr val="1F2937"/>
+                </a:solidFill>
+                <a:latin typeface="Calibri"/>
+              </a:rPr>
+              <a:t>Learn the taxonomy by name</a:t>
+            </a:r>
+          </a:p>
+        </p:txBody>
+      </p:sp>
+      <p:sp>
+        <p:nvSpPr>
+          <p:cNvPr id="7" name="TextBox 6"/>
+          <p:cNvSpPr txBox="1"/>
+          <p:nvPr/>
+        </p:nvSpPr>
+        <p:spPr>
+          <a:xfrm>
+            <a:off x="978408" y="3246120"/>
+            <a:ext cx="2899562" cy="1737360"/>
+          </a:xfrm>
+          <a:prstGeom prst="rect">
+            <a:avLst/>
+          </a:prstGeom>
+          <a:noFill/>
+        </p:spPr>
+        <p:txBody>
+          <a:bodyPr wrap="square" lIns="0" rIns="0" tIns="0" bIns="0" anchor="t">
+            <a:spAutoFit/>
+          </a:bodyPr>
+          <a:lstStyle/>
+          <a:p>
+            <a:pPr algn="l">
+              <a:lnSpc>
+                <a:spcPct val="105000"/>
+              </a:lnSpc>
+              <a:spcAft>
+                <a:spcPts val="200"/>
+              </a:spcAft>
+            </a:pPr>
+            <a:r>
+              <a:rPr sz="1350" b="0" i="0">
+                <a:solidFill>
+                  <a:srgbClr val="333D4B"/>
+                </a:solidFill>
+                <a:latin typeface="Calibri"/>
+              </a:rPr>
+              <a:t>Nine failure modes across three groups. Most diagnosis questions are asking you to name one. If you can name them, you can answer them.</a:t>
+            </a:r>
+          </a:p>
+        </p:txBody>
+      </p:sp>
+      <p:sp>
+        <p:nvSpPr>
+          <p:cNvPr id="8" name="Rounded Rectangle 7"/>
+          <p:cNvSpPr/>
+          <p:nvPr/>
+        </p:nvSpPr>
+        <p:spPr>
+          <a:xfrm>
+            <a:off x="4444898" y="2057400"/>
+            <a:ext cx="3301898" cy="3200400"/>
+          </a:xfrm>
+          <a:prstGeom prst="roundRect">
+            <a:avLst>
+              <a:gd name="adj" fmla="val 10000"/>
+            </a:avLst>
+          </a:prstGeom>
+          <a:solidFill>
+            <a:srgbClr val="F1F5F9"/>
+          </a:solidFill>
+          <a:ln w="15875">
+            <a:solidFill>
+              <a:srgbClr val="D3DDE6"/>
+            </a:solidFill>
+          </a:ln>
+          <a:effectLst/>
+        </p:spPr>
+        <p:style>
+          <a:lnRef idx="1">
+            <a:schemeClr val="accent1"/>
+          </a:lnRef>
+          <a:fillRef idx="3">
+            <a:schemeClr val="accent1"/>
+          </a:fillRef>
+          <a:effectRef idx="2">
+            <a:schemeClr val="accent1"/>
+          </a:effectRef>
+          <a:fontRef idx="minor">
+            <a:schemeClr val="lt1"/>
+          </a:fontRef>
+        </p:style>
+        <p:txBody>
+          <a:bodyPr rtlCol="0" anchor="ctr"/>
+          <a:lstStyle/>
+          <a:p>
+            <a:pPr algn="ctr"/>
+          </a:p>
+        </p:txBody>
+      </p:sp>
+      <p:sp>
+        <p:nvSpPr>
+          <p:cNvPr id="9" name="Rectangle 8"/>
+          <p:cNvSpPr/>
+          <p:nvPr/>
+        </p:nvSpPr>
+        <p:spPr>
+          <a:xfrm>
+            <a:off x="4646066" y="2331720"/>
+            <a:ext cx="640080" cy="38100"/>
+          </a:xfrm>
+          <a:prstGeom prst="rect">
+            <a:avLst/>
+          </a:prstGeom>
+          <a:solidFill>
+            <a:srgbClr val="0F766E"/>
+          </a:solidFill>
+          <a:ln>
+            <a:noFill/>
+          </a:ln>
+          <a:effectLst/>
+        </p:spPr>
+        <p:style>
+          <a:lnRef idx="1">
+            <a:schemeClr val="accent1"/>
+          </a:lnRef>
+          <a:fillRef idx="3">
+            <a:schemeClr val="accent1"/>
+          </a:fillRef>
+          <a:effectRef idx="2">
+            <a:schemeClr val="accent1"/>
+          </a:effectRef>
+          <a:fontRef idx="minor">
+            <a:schemeClr val="lt1"/>
+          </a:fontRef>
+        </p:style>
+        <p:txBody>
+          <a:bodyPr rtlCol="0" anchor="ctr"/>
+          <a:lstStyle/>
+          <a:p>
+            <a:pPr algn="ctr"/>
+          </a:p>
+        </p:txBody>
+      </p:sp>
+      <p:sp>
+        <p:nvSpPr>
+          <p:cNvPr id="10" name="TextBox 9"/>
+          <p:cNvSpPr txBox="1"/>
+          <p:nvPr/>
+        </p:nvSpPr>
+        <p:spPr>
+          <a:xfrm>
+            <a:off x="4646066" y="2560320"/>
+            <a:ext cx="2899562" cy="640080"/>
+          </a:xfrm>
+          <a:prstGeom prst="rect">
+            <a:avLst/>
+          </a:prstGeom>
+          <a:noFill/>
+        </p:spPr>
+        <p:txBody>
+          <a:bodyPr wrap="square" lIns="0" rIns="0" tIns="0" bIns="0" anchor="t">
+            <a:spAutoFit/>
+          </a:bodyPr>
+          <a:lstStyle/>
+          <a:p>
+            <a:pPr algn="l">
+              <a:lnSpc>
+                <a:spcPct val="105000"/>
+              </a:lnSpc>
+              <a:spcAft>
+                <a:spcPts val="200"/>
+              </a:spcAft>
+            </a:pPr>
+            <a:r>
+              <a:rPr sz="1800" b="1" i="0">
+                <a:solidFill>
+                  <a:srgbClr val="1F2937"/>
+                </a:solidFill>
+                <a:latin typeface="Calibri"/>
+              </a:rPr>
+              <a:t>Be able to explain mechanisms, not just state them</a:t>
+            </a:r>
+          </a:p>
+        </p:txBody>
+      </p:sp>
+      <p:sp>
+        <p:nvSpPr>
+          <p:cNvPr id="11" name="TextBox 10"/>
+          <p:cNvSpPr txBox="1"/>
+          <p:nvPr/>
+        </p:nvSpPr>
+        <p:spPr>
+          <a:xfrm>
+            <a:off x="4646066" y="3246120"/>
+            <a:ext cx="2899562" cy="1737360"/>
+          </a:xfrm>
+          <a:prstGeom prst="rect">
+            <a:avLst/>
+          </a:prstGeom>
+          <a:noFill/>
+        </p:spPr>
+        <p:txBody>
+          <a:bodyPr wrap="square" lIns="0" rIns="0" tIns="0" bIns="0" anchor="t">
+            <a:spAutoFit/>
+          </a:bodyPr>
+          <a:lstStyle/>
+          <a:p>
+            <a:pPr algn="l">
+              <a:lnSpc>
+                <a:spcPct val="105000"/>
+              </a:lnSpc>
+              <a:spcAft>
+                <a:spcPts val="200"/>
+              </a:spcAft>
+            </a:pPr>
+            <a:r>
+              <a:rPr sz="1350" b="0" i="0">
+                <a:solidFill>
+                  <a:srgbClr val="333D4B"/>
+                </a:solidFill>
+                <a:latin typeface="Calibri"/>
+              </a:rPr>
+              <a:t>Not "it hallucinates" but why — no truth check, plausibility optimised, thin coverage where plausible and true come apart.</a:t>
+            </a:r>
+          </a:p>
+        </p:txBody>
+      </p:sp>
+      <p:sp>
+        <p:nvSpPr>
+          <p:cNvPr id="12" name="Rounded Rectangle 11"/>
+          <p:cNvSpPr/>
+          <p:nvPr/>
+        </p:nvSpPr>
+        <p:spPr>
+          <a:xfrm>
+            <a:off x="8112556" y="2057400"/>
+            <a:ext cx="3301898" cy="3200400"/>
+          </a:xfrm>
+          <a:prstGeom prst="roundRect">
+            <a:avLst>
+              <a:gd name="adj" fmla="val 10000"/>
+            </a:avLst>
+          </a:prstGeom>
+          <a:solidFill>
+            <a:srgbClr val="F1F5F9"/>
+          </a:solidFill>
+          <a:ln w="15875">
+            <a:solidFill>
+              <a:srgbClr val="D3DDE6"/>
+            </a:solidFill>
+          </a:ln>
+          <a:effectLst/>
+        </p:spPr>
+        <p:style>
+          <a:lnRef idx="1">
+            <a:schemeClr val="accent1"/>
+          </a:lnRef>
+          <a:fillRef idx="3">
+            <a:schemeClr val="accent1"/>
+          </a:fillRef>
+          <a:effectRef idx="2">
+            <a:schemeClr val="accent1"/>
+          </a:effectRef>
+          <a:fontRef idx="minor">
+            <a:schemeClr val="lt1"/>
+          </a:fontRef>
+        </p:style>
+        <p:txBody>
+          <a:bodyPr rtlCol="0" anchor="ctr"/>
+          <a:lstStyle/>
+          <a:p>
+            <a:pPr algn="ctr"/>
+          </a:p>
+        </p:txBody>
+      </p:sp>
+      <p:sp>
+        <p:nvSpPr>
+          <p:cNvPr id="13" name="Rectangle 12"/>
+          <p:cNvSpPr/>
+          <p:nvPr/>
+        </p:nvSpPr>
+        <p:spPr>
+          <a:xfrm>
+            <a:off x="8313724" y="2331720"/>
+            <a:ext cx="640080" cy="38100"/>
+          </a:xfrm>
+          <a:prstGeom prst="rect">
+            <a:avLst/>
+          </a:prstGeom>
+          <a:solidFill>
+            <a:srgbClr val="0F766E"/>
+          </a:solidFill>
+          <a:ln>
+            <a:noFill/>
+          </a:ln>
+          <a:effectLst/>
+        </p:spPr>
+        <p:style>
+          <a:lnRef idx="1">
+            <a:schemeClr val="accent1"/>
+          </a:lnRef>
+          <a:fillRef idx="3">
+            <a:schemeClr val="accent1"/>
+          </a:fillRef>
+          <a:effectRef idx="2">
+            <a:schemeClr val="accent1"/>
+          </a:effectRef>
+          <a:fontRef idx="minor">
+            <a:schemeClr val="lt1"/>
+          </a:fontRef>
+        </p:style>
+        <p:txBody>
+          <a:bodyPr rtlCol="0" anchor="ctr"/>
+          <a:lstStyle/>
+          <a:p>
+            <a:pPr algn="ctr"/>
+          </a:p>
+        </p:txBody>
+      </p:sp>
+      <p:sp>
+        <p:nvSpPr>
+          <p:cNvPr id="14" name="TextBox 13"/>
+          <p:cNvSpPr txBox="1"/>
+          <p:nvPr/>
+        </p:nvSpPr>
+        <p:spPr>
+          <a:xfrm>
+            <a:off x="8313724" y="2560320"/>
+            <a:ext cx="2899562" cy="640080"/>
+          </a:xfrm>
+          <a:prstGeom prst="rect">
+            <a:avLst/>
+          </a:prstGeom>
+          <a:noFill/>
+        </p:spPr>
+        <p:txBody>
+          <a:bodyPr wrap="square" lIns="0" rIns="0" tIns="0" bIns="0" anchor="t">
+            <a:spAutoFit/>
+          </a:bodyPr>
+          <a:lstStyle/>
+          <a:p>
+            <a:pPr algn="l">
+              <a:lnSpc>
+                <a:spcPct val="105000"/>
+              </a:lnSpc>
+              <a:spcAft>
+                <a:spcPts val="200"/>
+              </a:spcAft>
+            </a:pPr>
+            <a:r>
+              <a:rPr sz="1800" b="1" i="0">
+                <a:solidFill>
+                  <a:srgbClr val="1F2937"/>
+                </a:solidFill>
+                <a:latin typeface="Calibri"/>
+              </a:rPr>
+              <a:t>Practise on your own artifacts</a:t>
+            </a:r>
+          </a:p>
+        </p:txBody>
+      </p:sp>
+      <p:sp>
+        <p:nvSpPr>
+          <p:cNvPr id="15" name="TextBox 14"/>
+          <p:cNvSpPr txBox="1"/>
+          <p:nvPr/>
+        </p:nvSpPr>
+        <p:spPr>
+          <a:xfrm>
+            <a:off x="8313724" y="3246120"/>
+            <a:ext cx="2899562" cy="1737360"/>
+          </a:xfrm>
+          <a:prstGeom prst="rect">
+            <a:avLst/>
+          </a:prstGeom>
+          <a:noFill/>
+        </p:spPr>
+        <p:txBody>
+          <a:bodyPr wrap="square" lIns="0" rIns="0" tIns="0" bIns="0" anchor="t">
+            <a:spAutoFit/>
+          </a:bodyPr>
+          <a:lstStyle/>
+          <a:p>
+            <a:pPr algn="l">
+              <a:lnSpc>
+                <a:spcPct val="105000"/>
+              </a:lnSpc>
+              <a:spcAft>
+                <a:spcPts val="200"/>
+              </a:spcAft>
+            </a:pPr>
+            <a:r>
+              <a:rPr sz="1350" b="0" i="0">
+                <a:solidFill>
+                  <a:srgbClr val="333D4B"/>
+                </a:solidFill>
+                <a:latin typeface="Calibri"/>
+              </a:rPr>
+              <a:t>Take your Field Build worksheet and ask: which of the nine could hit this? Where is the human? What did I constrain? That is the exam.</a:t>
+            </a:r>
+          </a:p>
+        </p:txBody>
+      </p:sp>
+      <p:sp>
+        <p:nvSpPr>
+          <p:cNvPr id="16" name="TextBox 15"/>
+          <p:cNvSpPr txBox="1"/>
+          <p:nvPr/>
+        </p:nvSpPr>
+        <p:spPr>
+          <a:xfrm>
+            <a:off x="777240" y="6355080"/>
+            <a:ext cx="10637215" cy="274320"/>
+          </a:xfrm>
+          <a:prstGeom prst="rect">
+            <a:avLst/>
+          </a:prstGeom>
+          <a:noFill/>
+        </p:spPr>
+        <p:txBody>
+          <a:bodyPr wrap="square" lIns="0" rIns="0" tIns="0" bIns="0">
+            <a:spAutoFit/>
+          </a:bodyPr>
+          <a:lstStyle/>
+          <a:p>
+            <a:r>
+              <a:rPr sz="1000" b="0" i="0">
+                <a:solidFill>
+                  <a:srgbClr val="6B7787"/>
+                </a:solidFill>
+                <a:latin typeface="Calibri"/>
+              </a:rPr>
+              <a:t>Week 14  ·  Prompt Engineering and Large Language Models</a:t>
+            </a:r>
+          </a:p>
+        </p:txBody>
+      </p:sp>
+      <p:sp>
+        <p:nvSpPr>
+          <p:cNvPr id="17" name="TextBox 16"/>
+          <p:cNvSpPr txBox="1"/>
+          <p:nvPr/>
+        </p:nvSpPr>
+        <p:spPr>
+          <a:xfrm>
+            <a:off x="10500055" y="6355080"/>
+            <a:ext cx="914400" cy="274320"/>
+          </a:xfrm>
+          <a:prstGeom prst="rect">
+            <a:avLst/>
+          </a:prstGeom>
+          <a:noFill/>
+        </p:spPr>
+        <p:txBody>
+          <a:bodyPr wrap="square" lIns="0" rIns="0" tIns="0" bIns="0">
+            <a:spAutoFit/>
+          </a:bodyPr>
+          <a:lstStyle/>
+          <a:p>
+            <a:pPr algn="r"/>
+            <a:r>
+              <a:rPr sz="1000" b="0" i="0">
+                <a:solidFill>
+                  <a:srgbClr val="6B7787"/>
+                </a:solidFill>
+                <a:latin typeface="Calibri"/>
+              </a:rPr>
+              <a:t>18</a:t>
+            </a:r>
+          </a:p>
+        </p:txBody>
+      </p:sp>
+    </p:spTree>
+  </p:cSld>
+  <p:clrMapOvr>
+    <a:masterClrMapping/>
+  </p:clrMapOvr>
+</p:sld>
+</file>
+
+<file path=ppt/slides/slide19.xml><?xml version="1.0" encoding="utf-8"?>
+<p:sld xmlns:a="http://schemas.openxmlformats.org/drawingml/2006/main" xmlns:p="http://schemas.openxmlformats.org/presentationml/2006/main" xmlns:r="http://schemas.openxmlformats.org/officeDocument/2006/relationships">
+  <p:cSld>
+    <p:spTree>
+      <p:nvGrpSpPr>
+        <p:cNvPr id="1" name=""/>
+        <p:cNvGrpSpPr/>
+        <p:nvPr/>
+      </p:nvGrpSpPr>
+      <p:grpSpPr/>
+      <p:sp>
+        <p:nvSpPr>
+          <p:cNvPr id="2" name="TextBox 1"/>
+          <p:cNvSpPr txBox="1"/>
+          <p:nvPr/>
+        </p:nvSpPr>
+        <p:spPr>
+          <a:xfrm>
+            <a:off x="777240" y="566928"/>
+            <a:ext cx="10637215" cy="822960"/>
+          </a:xfrm>
+          <a:prstGeom prst="rect">
+            <a:avLst/>
+          </a:prstGeom>
+          <a:noFill/>
+        </p:spPr>
+        <p:txBody>
+          <a:bodyPr wrap="square" lIns="0" rIns="0" tIns="0" bIns="0">
+            <a:spAutoFit/>
+          </a:bodyPr>
+          <a:lstStyle/>
+          <a:p>
+            <a:r>
+              <a:rPr sz="3000" b="1" i="0">
+                <a:solidFill>
+                  <a:srgbClr val="1F2937"/>
+                </a:solidFill>
+                <a:latin typeface="Calibri Light"/>
+              </a:rPr>
+              <a:t>Closing</a:t>
+            </a:r>
+          </a:p>
+        </p:txBody>
+      </p:sp>
+      <p:sp>
+        <p:nvSpPr>
+          <p:cNvPr id="3" name="Rectangle 2"/>
+          <p:cNvSpPr/>
+          <p:nvPr/>
+        </p:nvSpPr>
+        <p:spPr>
+          <a:xfrm>
+            <a:off x="777240" y="1417320"/>
+            <a:ext cx="1051560" cy="38100"/>
+          </a:xfrm>
+          <a:prstGeom prst="rect">
+            <a:avLst/>
+          </a:prstGeom>
+          <a:solidFill>
+            <a:srgbClr val="0F766E"/>
+          </a:solidFill>
+          <a:ln>
+            <a:noFill/>
+          </a:ln>
+          <a:effectLst/>
+        </p:spPr>
+        <p:style>
+          <a:lnRef idx="1">
+            <a:schemeClr val="accent1"/>
+          </a:lnRef>
+          <a:fillRef idx="3">
+            <a:schemeClr val="accent1"/>
+          </a:fillRef>
+          <a:effectRef idx="2">
+            <a:schemeClr val="accent1"/>
+          </a:effectRef>
+          <a:fontRef idx="minor">
+            <a:schemeClr val="lt1"/>
+          </a:fontRef>
+        </p:style>
+        <p:txBody>
+          <a:bodyPr rtlCol="0" anchor="ctr"/>
+          <a:lstStyle/>
+          <a:p>
+            <a:pPr algn="ctr"/>
+          </a:p>
+        </p:txBody>
+      </p:sp>
+      <p:sp>
+        <p:nvSpPr>
+          <p:cNvPr id="4" name="TextBox 3"/>
+          <p:cNvSpPr txBox="1"/>
+          <p:nvPr/>
+        </p:nvSpPr>
+        <p:spPr>
+          <a:xfrm>
+            <a:off x="777240" y="1783080"/>
+            <a:ext cx="10637215" cy="4343400"/>
+          </a:xfrm>
+          <a:prstGeom prst="rect">
+            <a:avLst/>
+          </a:prstGeom>
+          <a:noFill/>
+        </p:spPr>
+        <p:txBody>
+          <a:bodyPr wrap="square" lIns="0" rIns="0" tIns="0" bIns="0">
+            <a:spAutoFit/>
+          </a:bodyPr>
+          <a:lstStyle/>
+          <a:p>
+            <a:pPr>
+              <a:lnSpc>
+                <a:spcPct val="115000"/>
+              </a:lnSpc>
+              <a:spcAft>
+                <a:spcPts val="1000"/>
+              </a:spcAft>
+            </a:pPr>
+            <a:r>
+              <a:rPr sz="1900" b="0" i="0">
+                <a:solidFill>
+                  <a:srgbClr val="1F2937"/>
+                </a:solidFill>
+                <a:latin typeface="Calibri"/>
+              </a:rPr>
+              <a:t>•  You can explain how these systems work, in plain language, to anyone</a:t>
+            </a:r>
+          </a:p>
+          <a:p>
+            <a:pPr>
+              <a:lnSpc>
+                <a:spcPct val="115000"/>
+              </a:lnSpc>
+              <a:spcAft>
+                <a:spcPts val="1000"/>
+              </a:spcAft>
+            </a:pPr>
+            <a:r>
+              <a:rPr sz="1900" b="0" i="0">
+                <a:solidFill>
+                  <a:srgbClr val="1F2937"/>
+                </a:solidFill>
+                <a:latin typeface="Calibri"/>
+              </a:rPr>
+              <a:t>•  You have built four things and broken three of them</a:t>
+            </a:r>
+          </a:p>
+          <a:p>
+            <a:pPr>
+              <a:lnSpc>
+                <a:spcPct val="115000"/>
+              </a:lnSpc>
+              <a:spcAft>
+                <a:spcPts val="1000"/>
+              </a:spcAft>
+            </a:pPr>
+            <a:r>
+              <a:rPr sz="1900" b="1" i="0">
+                <a:solidFill>
+                  <a:srgbClr val="1F2937"/>
+                </a:solidFill>
+                <a:latin typeface="Calibri"/>
+              </a:rPr>
+              <a:t>•  You know that every failure that matters is invisible in the output</a:t>
+            </a:r>
+          </a:p>
+          <a:p>
+            <a:pPr>
+              <a:lnSpc>
+                <a:spcPct val="115000"/>
+              </a:lnSpc>
+              <a:spcAft>
+                <a:spcPts val="1000"/>
+              </a:spcAft>
+            </a:pPr>
+            <a:r>
+              <a:rPr sz="1900" b="0" i="0">
+                <a:solidFill>
+                  <a:srgbClr val="1F2937"/>
+                </a:solidFill>
+                <a:latin typeface="Calibri"/>
+              </a:rPr>
+              <a:t>•  And you know what to do about it: supply sources, ask for the basis, test what it cannot know, keep the human before the irreversible step</a:t>
+            </a:r>
+          </a:p>
+          <a:p>
+            <a:pPr>
+              <a:lnSpc>
+                <a:spcPct val="115000"/>
+              </a:lnSpc>
+              <a:spcAft>
+                <a:spcPts val="1000"/>
+              </a:spcAft>
+            </a:pPr>
+          </a:p>
+          <a:p>
+            <a:pPr lvl="1">
+              <a:lnSpc>
+                <a:spcPct val="115000"/>
+              </a:lnSpc>
+              <a:spcAft>
+                <a:spcPts val="500"/>
+              </a:spcAft>
+            </a:pPr>
+            <a:r>
+              <a:rPr sz="1600" b="0" i="0">
+                <a:solidFill>
+                  <a:srgbClr val="333D4B"/>
+                </a:solidFill>
+                <a:latin typeface="Calibri"/>
+              </a:rPr>
+              <a:t>—  The tools will change. All of that survives them.</a:t>
+            </a:r>
+          </a:p>
+        </p:txBody>
+      </p:sp>
+      <p:sp>
+        <p:nvSpPr>
+          <p:cNvPr id="5" name="TextBox 4"/>
+          <p:cNvSpPr txBox="1"/>
+          <p:nvPr/>
+        </p:nvSpPr>
+        <p:spPr>
+          <a:xfrm>
+            <a:off x="777240" y="6355080"/>
+            <a:ext cx="10637215" cy="274320"/>
+          </a:xfrm>
+          <a:prstGeom prst="rect">
+            <a:avLst/>
+          </a:prstGeom>
+          <a:noFill/>
+        </p:spPr>
+        <p:txBody>
+          <a:bodyPr wrap="square" lIns="0" rIns="0" tIns="0" bIns="0">
+            <a:spAutoFit/>
+          </a:bodyPr>
+          <a:lstStyle/>
+          <a:p>
+            <a:r>
+              <a:rPr sz="1000" b="0" i="0">
+                <a:solidFill>
+                  <a:srgbClr val="6B7787"/>
+                </a:solidFill>
+                <a:latin typeface="Calibri"/>
+              </a:rPr>
+              <a:t>Week 14  ·  Prompt Engineering and Large Language Models</a:t>
+            </a:r>
+          </a:p>
+        </p:txBody>
+      </p:sp>
+      <p:sp>
+        <p:nvSpPr>
+          <p:cNvPr id="6" name="TextBox 5"/>
+          <p:cNvSpPr txBox="1"/>
+          <p:nvPr/>
+        </p:nvSpPr>
+        <p:spPr>
+          <a:xfrm>
+            <a:off x="10500055" y="6355080"/>
+            <a:ext cx="914400" cy="274320"/>
+          </a:xfrm>
+          <a:prstGeom prst="rect">
+            <a:avLst/>
+          </a:prstGeom>
+          <a:noFill/>
+        </p:spPr>
+        <p:txBody>
+          <a:bodyPr wrap="square" lIns="0" rIns="0" tIns="0" bIns="0">
+            <a:spAutoFit/>
+          </a:bodyPr>
+          <a:lstStyle/>
+          <a:p>
+            <a:pPr algn="r"/>
+            <a:r>
+              <a:rPr sz="1000" b="0" i="0">
+                <a:solidFill>
+                  <a:srgbClr val="6B7787"/>
+                </a:solidFill>
+                <a:latin typeface="Calibri"/>
+              </a:rPr>
+              <a:t>19</a:t>
             </a:r>
           </a:p>
         </p:txBody>
@@ -8533,6 +10410,201 @@
                 <a:latin typeface="Calibri"/>
               </a:rPr>
               <a:t>2</a:t>
+            </a:r>
+          </a:p>
+        </p:txBody>
+      </p:sp>
+    </p:spTree>
+  </p:cSld>
+  <p:clrMapOvr>
+    <a:masterClrMapping/>
+  </p:clrMapOvr>
+</p:sld>
+</file>
+
+<file path=ppt/slides/slide20.xml><?xml version="1.0" encoding="utf-8"?>
+<p:sld xmlns:a="http://schemas.openxmlformats.org/drawingml/2006/main" xmlns:p="http://schemas.openxmlformats.org/presentationml/2006/main" xmlns:r="http://schemas.openxmlformats.org/officeDocument/2006/relationships">
+  <p:cSld>
+    <p:spTree>
+      <p:nvGrpSpPr>
+        <p:cNvPr id="1" name=""/>
+        <p:cNvGrpSpPr/>
+        <p:nvPr/>
+      </p:nvGrpSpPr>
+      <p:grpSpPr/>
+      <p:sp>
+        <p:nvSpPr>
+          <p:cNvPr id="2" name="Rectangle 1"/>
+          <p:cNvSpPr/>
+          <p:nvPr/>
+        </p:nvSpPr>
+        <p:spPr>
+          <a:xfrm>
+            <a:off x="0" y="0"/>
+            <a:ext cx="12191695" cy="6858000"/>
+          </a:xfrm>
+          <a:prstGeom prst="rect">
+            <a:avLst/>
+          </a:prstGeom>
+          <a:solidFill>
+            <a:srgbClr val="1F2937"/>
+          </a:solidFill>
+          <a:ln>
+            <a:noFill/>
+          </a:ln>
+          <a:effectLst/>
+        </p:spPr>
+        <p:style>
+          <a:lnRef idx="1">
+            <a:schemeClr val="accent1"/>
+          </a:lnRef>
+          <a:fillRef idx="3">
+            <a:schemeClr val="accent1"/>
+          </a:fillRef>
+          <a:effectRef idx="2">
+            <a:schemeClr val="accent1"/>
+          </a:effectRef>
+          <a:fontRef idx="minor">
+            <a:schemeClr val="lt1"/>
+          </a:fontRef>
+        </p:style>
+        <p:txBody>
+          <a:bodyPr rtlCol="0" anchor="ctr"/>
+          <a:lstStyle/>
+          <a:p>
+            <a:pPr algn="ctr"/>
+          </a:p>
+        </p:txBody>
+      </p:sp>
+      <p:sp>
+        <p:nvSpPr>
+          <p:cNvPr id="3" name="TextBox 2"/>
+          <p:cNvSpPr txBox="1"/>
+          <p:nvPr/>
+        </p:nvSpPr>
+        <p:spPr>
+          <a:xfrm>
+            <a:off x="777240" y="2468880"/>
+            <a:ext cx="10241280" cy="914400"/>
+          </a:xfrm>
+          <a:prstGeom prst="rect">
+            <a:avLst/>
+          </a:prstGeom>
+          <a:noFill/>
+        </p:spPr>
+        <p:txBody>
+          <a:bodyPr wrap="square" lIns="0" rIns="0" tIns="0" bIns="0">
+            <a:spAutoFit/>
+          </a:bodyPr>
+          <a:lstStyle/>
+          <a:p>
+            <a:r>
+              <a:rPr sz="4400" b="1" i="0">
+                <a:solidFill>
+                  <a:srgbClr val="FFFFFF"/>
+                </a:solidFill>
+                <a:latin typeface="Calibri Light"/>
+              </a:rPr>
+              <a:t>Questions?</a:t>
+            </a:r>
+          </a:p>
+        </p:txBody>
+      </p:sp>
+      <p:sp>
+        <p:nvSpPr>
+          <p:cNvPr id="4" name="Rectangle 3"/>
+          <p:cNvSpPr/>
+          <p:nvPr/>
+        </p:nvSpPr>
+        <p:spPr>
+          <a:xfrm>
+            <a:off x="777240" y="3566160"/>
+            <a:ext cx="1051560" cy="50800"/>
+          </a:xfrm>
+          <a:prstGeom prst="rect">
+            <a:avLst/>
+          </a:prstGeom>
+          <a:solidFill>
+            <a:srgbClr val="0F766E"/>
+          </a:solidFill>
+          <a:ln>
+            <a:noFill/>
+          </a:ln>
+          <a:effectLst/>
+        </p:spPr>
+        <p:style>
+          <a:lnRef idx="1">
+            <a:schemeClr val="accent1"/>
+          </a:lnRef>
+          <a:fillRef idx="3">
+            <a:schemeClr val="accent1"/>
+          </a:fillRef>
+          <a:effectRef idx="2">
+            <a:schemeClr val="accent1"/>
+          </a:effectRef>
+          <a:fontRef idx="minor">
+            <a:schemeClr val="lt1"/>
+          </a:fontRef>
+        </p:style>
+        <p:txBody>
+          <a:bodyPr rtlCol="0" anchor="ctr"/>
+          <a:lstStyle/>
+          <a:p>
+            <a:pPr algn="ctr"/>
+          </a:p>
+        </p:txBody>
+      </p:sp>
+      <p:sp>
+        <p:nvSpPr>
+          <p:cNvPr id="5" name="TextBox 4"/>
+          <p:cNvSpPr txBox="1"/>
+          <p:nvPr/>
+        </p:nvSpPr>
+        <p:spPr>
+          <a:xfrm>
+            <a:off x="777240" y="3931920"/>
+            <a:ext cx="10241280" cy="914400"/>
+          </a:xfrm>
+          <a:prstGeom prst="rect">
+            <a:avLst/>
+          </a:prstGeom>
+          <a:noFill/>
+        </p:spPr>
+        <p:txBody>
+          <a:bodyPr wrap="square" lIns="0" rIns="0" tIns="0" bIns="0">
+            <a:spAutoFit/>
+          </a:bodyPr>
+          <a:lstStyle/>
+          <a:p>
+            <a:pPr>
+              <a:spcAft>
+                <a:spcPts val="500"/>
+              </a:spcAft>
+            </a:pPr>
+            <a:r>
+              <a:rPr sz="1700" b="0" i="0">
+                <a:solidFill>
+                  <a:srgbClr val="FFFFFF"/>
+                </a:solidFill>
+                <a:latin typeface="Calibri"/>
+              </a:rPr>
+              <a:t>Mehmet Ali Akyol, PhD</a:t>
+            </a:r>
+          </a:p>
+          <a:p>
+            <a:pPr>
+              <a:spcAft>
+                <a:spcPts val="500"/>
+              </a:spcAft>
+            </a:pPr>
+            <a:r>
+              <a:rPr sz="1700" b="0" i="0">
+                <a:solidFill>
+                  <a:srgbClr val="C3D0DB"/>
+                </a:solidFill>
+                <a:latin typeface="Calibri"/>
+              </a:rPr>
+              <a:t>mehmetali.akyol@gmail.com</a:t>
             </a:r>
           </a:p>
         </p:txBody>
